--- a/codevui_md_docs.pptx
+++ b/codevui_md_docs.pptx
@@ -4,6 +4,9 @@
   <p:sldMasterIdLst>
     <p:sldMasterId id="2147483648" r:id="rId1"/>
   </p:sldMasterIdLst>
+  <p:notesMasterIdLst>
+    <p:notesMasterId r:id="rId17"/>
+  </p:notesMasterIdLst>
   <p:sldIdLst>
     <p:sldId id="256" r:id="rId2"/>
     <p:sldId id="257" r:id="rId3"/>
@@ -21,10 +24,7 @@
     <p:sldId id="269" r:id="rId15"/>
     <p:sldId id="270" r:id="rId16"/>
   </p:sldIdLst>
-  <p:notesMasterIdLst>
-    <p:notesMasterId r:id="rId17"/>
-  </p:notesMasterIdLst>
-  <p:sldSz cx="9144000" cy="5143500"/>
+  <p:sldSz cx="9144000" cy="5143500" type="screen16x9"/>
   <p:notesSz cx="5143500" cy="9144000"/>
   <p:defaultTextStyle>
     <a:lvl1pPr marL="0" algn="l" defTabSz="914400" rtl="0" eaLnBrk="1" latinLnBrk="0" hangingPunct="1">
@@ -118,6 +118,11 @@
       </a:defRPr>
     </a:lvl9pPr>
   </p:defaultTextStyle>
+  <p:extLst>
+    <p:ext uri="{EFAFB233-063F-42B5-8137-9DF3F51BA10A}">
+      <p15:sldGuideLst xmlns:p15="http://schemas.microsoft.com/office/powerpoint/2012/main"/>
+    </p:ext>
+  </p:extLst>
 </p:presentation>
 </file>
 
@@ -143,234 +148,10 @@
           <a:chExt cx="0" cy="0"/>
         </a:xfrm>
       </p:grpSpPr>
-      <p:sp>
-        <p:nvSpPr>
-          <p:cNvPr id="2" name="Header Placeholder 1"/>
-          <p:cNvSpPr>
-            <a:spLocks noGrp="1"/>
-          </p:cNvSpPr>
-          <p:nvPr>
-            <p:ph type="hdr" sz="quarter"/>
-          </p:nvPr>
-        </p:nvSpPr>
-        <p:spPr>
-          <a:xfrm>
-            <a:off x="0" y="0"/>
-            <a:ext cx="2971800" cy="458788"/>
-          </a:xfrm>
-          <a:prstGeom prst="rect">
-            <a:avLst/>
-          </a:prstGeom>
-        </p:spPr>
-        <p:txBody>
-          <a:bodyPr vert="horz" lIns="91440" tIns="45720" rIns="91440" bIns="45720" rtlCol="0"/>
-          <a:lstStyle>
-            <a:lvl1pPr algn="l">
-              <a:defRPr sz="1200"/>
-            </a:lvl1pPr>
-          </a:lstStyle>
-          <a:p>
-            <a:endParaRPr lang="en-US"/>
-          </a:p>
-        </p:txBody>
-      </p:sp>
-      <p:sp>
-        <p:nvSpPr>
-          <p:cNvPr id="3" name="Date Placeholder 2"/>
-          <p:cNvSpPr>
-            <a:spLocks noGrp="1"/>
-          </p:cNvSpPr>
-          <p:nvPr>
-            <p:ph type="dt" idx="1"/>
-          </p:nvPr>
-        </p:nvSpPr>
-        <p:spPr>
-          <a:xfrm>
-            <a:off x="3884613" y="0"/>
-            <a:ext cx="2971800" cy="458788"/>
-          </a:xfrm>
-          <a:prstGeom prst="rect">
-            <a:avLst/>
-          </a:prstGeom>
-        </p:spPr>
-        <p:txBody>
-          <a:bodyPr vert="horz" lIns="91440" tIns="45720" rIns="91440" bIns="45720" rtlCol="0"/>
-          <a:lstStyle>
-            <a:lvl1pPr algn="r">
-              <a:defRPr sz="1200"/>
-            </a:lvl1pPr>
-          </a:lstStyle>
-          <a:p>
-            <a:fld id="{5282F153-3F37-0F45-9E97-73ACFA13230C}" type="datetimeFigureOut">
-              <a:rPr lang="en-US"/>
-              <a:t>7/23/19</a:t>
-            </a:fld>
-            <a:endParaRPr lang="en-US"/>
-          </a:p>
-        </p:txBody>
-      </p:sp>
-      <p:sp>
-        <p:nvSpPr>
-          <p:cNvPr id="4" name="Slide Image Placeholder 3"/>
-          <p:cNvSpPr>
-            <a:spLocks noGrp="1" noRot="1" noChangeAspect="1"/>
-          </p:cNvSpPr>
-          <p:nvPr>
-            <p:ph type="sldImg" idx="2"/>
-          </p:nvPr>
-        </p:nvSpPr>
-        <p:spPr>
-          <a:xfrm>
-            <a:off x="685800" y="1143000"/>
-            <a:ext cx="5486400" cy="3086100"/>
-          </a:xfrm>
-          <a:prstGeom prst="rect">
-            <a:avLst/>
-          </a:prstGeom>
-          <a:noFill/>
-          <a:ln w="12700">
-            <a:solidFill>
-              <a:prstClr val="black"/>
-            </a:solidFill>
-          </a:ln>
-        </p:spPr>
-        <p:txBody>
-          <a:bodyPr vert="horz" lIns="91440" tIns="45720" rIns="91440" bIns="45720" rtlCol="0" anchor="ctr"/>
-          <a:lstStyle/>
-          <a:p>
-            <a:endParaRPr lang="en-US"/>
-          </a:p>
-        </p:txBody>
-      </p:sp>
-      <p:sp>
-        <p:nvSpPr>
-          <p:cNvPr id="5" name="Notes Placeholder 4"/>
-          <p:cNvSpPr>
-            <a:spLocks noGrp="1"/>
-          </p:cNvSpPr>
-          <p:nvPr>
-            <p:ph type="body" sz="quarter" idx="3"/>
-          </p:nvPr>
-        </p:nvSpPr>
-        <p:spPr>
-          <a:xfrm>
-            <a:off x="685800" y="4400550"/>
-            <a:ext cx="5486400" cy="3600450"/>
-          </a:xfrm>
-          <a:prstGeom prst="rect">
-            <a:avLst/>
-          </a:prstGeom>
-        </p:spPr>
-        <p:txBody>
-          <a:bodyPr vert="horz" lIns="91440" tIns="45720" rIns="91440" bIns="45720" rtlCol="0"/>
-          <a:lstStyle/>
-          <a:p>
-            <a:pPr lvl="0"/>
-            <a:r>
-              <a:rPr lang="en-US"/>
-              <a:t>Click to edit Master text styles</a:t>
-            </a:r>
-          </a:p>
-          <a:p>
-            <a:pPr lvl="1"/>
-            <a:r>
-              <a:rPr lang="en-US"/>
-              <a:t>Second level</a:t>
-            </a:r>
-          </a:p>
-          <a:p>
-            <a:pPr lvl="2"/>
-            <a:r>
-              <a:rPr lang="en-US"/>
-              <a:t>Third level</a:t>
-            </a:r>
-          </a:p>
-          <a:p>
-            <a:pPr lvl="3"/>
-            <a:r>
-              <a:rPr lang="en-US"/>
-              <a:t>Fourth level</a:t>
-            </a:r>
-          </a:p>
-          <a:p>
-            <a:pPr lvl="4"/>
-            <a:r>
-              <a:rPr lang="en-US"/>
-              <a:t>Fifth level</a:t>
-            </a:r>
-          </a:p>
-        </p:txBody>
-      </p:sp>
-      <p:sp>
-        <p:nvSpPr>
-          <p:cNvPr id="6" name="Footer Placeholder 5"/>
-          <p:cNvSpPr>
-            <a:spLocks noGrp="1"/>
-          </p:cNvSpPr>
-          <p:nvPr>
-            <p:ph type="ftr" sz="quarter" idx="4"/>
-          </p:nvPr>
-        </p:nvSpPr>
-        <p:spPr>
-          <a:xfrm>
-            <a:off x="0" y="8685213"/>
-            <a:ext cx="2971800" cy="458787"/>
-          </a:xfrm>
-          <a:prstGeom prst="rect">
-            <a:avLst/>
-          </a:prstGeom>
-        </p:spPr>
-        <p:txBody>
-          <a:bodyPr vert="horz" lIns="91440" tIns="45720" rIns="91440" bIns="45720" rtlCol="0" anchor="b"/>
-          <a:lstStyle>
-            <a:lvl1pPr algn="l">
-              <a:defRPr sz="1200"/>
-            </a:lvl1pPr>
-          </a:lstStyle>
-          <a:p>
-            <a:endParaRPr lang="en-US"/>
-          </a:p>
-        </p:txBody>
-      </p:sp>
-      <p:sp>
-        <p:nvSpPr>
-          <p:cNvPr id="7" name="Slide Number Placeholder 6"/>
-          <p:cNvSpPr>
-            <a:spLocks noGrp="1"/>
-          </p:cNvSpPr>
-          <p:nvPr>
-            <p:ph type="sldNum" sz="quarter" idx="5"/>
-          </p:nvPr>
-        </p:nvSpPr>
-        <p:spPr>
-          <a:xfrm>
-            <a:off x="3884613" y="8685213"/>
-            <a:ext cx="2971800" cy="458787"/>
-          </a:xfrm>
-          <a:prstGeom prst="rect">
-            <a:avLst/>
-          </a:prstGeom>
-        </p:spPr>
-        <p:txBody>
-          <a:bodyPr vert="horz" lIns="91440" tIns="45720" rIns="91440" bIns="45720" rtlCol="0" anchor="b"/>
-          <a:lstStyle>
-            <a:lvl1pPr algn="r">
-              <a:defRPr sz="1200"/>
-            </a:lvl1pPr>
-          </a:lstStyle>
-          <a:p>
-            <a:fld id="{CE5E9CC1-C706-0F49-92D6-E571CC5EEA8F}" type="slidenum">
-              <a:rPr lang="en-US"/>
-              <a:t>‹#›</a:t>
-            </a:fld>
-            <a:endParaRPr lang="en-US"/>
-          </a:p>
-        </p:txBody>
-      </p:sp>
     </p:spTree>
     <p:extLst>
       <p:ext uri="{BB962C8B-B14F-4D97-AF65-F5344CB8AC3E}">
-        <p14:creationId xmlns:p14="http://schemas.microsoft.com/office/powerpoint/2010/main" val="1024086991"/>
+        <p14:creationId xmlns:p14="http://schemas.microsoft.com/office/powerpoint/2010/main" val="145548922"/>
       </p:ext>
     </p:extLst>
   </p:cSld>
@@ -514,10 +295,6 @@
           <a:bodyPr/>
           <a:lstStyle/>
           <a:p>
-            <a:r>
-              <a:rPr lang="en-US" dirty="0"/>
-              <a:t/>
-            </a:r>
             <a:endParaRPr lang="en-US" dirty="0"/>
           </a:p>
         </p:txBody>
@@ -602,10 +379,6 @@
           <a:bodyPr/>
           <a:lstStyle/>
           <a:p>
-            <a:r>
-              <a:rPr lang="en-US" dirty="0"/>
-              <a:t/>
-            </a:r>
             <a:endParaRPr lang="en-US" dirty="0"/>
           </a:p>
         </p:txBody>
@@ -690,10 +463,6 @@
           <a:bodyPr/>
           <a:lstStyle/>
           <a:p>
-            <a:r>
-              <a:rPr lang="en-US" dirty="0"/>
-              <a:t/>
-            </a:r>
             <a:endParaRPr lang="en-US" dirty="0"/>
           </a:p>
         </p:txBody>
@@ -778,10 +547,6 @@
           <a:bodyPr/>
           <a:lstStyle/>
           <a:p>
-            <a:r>
-              <a:rPr lang="en-US" dirty="0"/>
-              <a:t/>
-            </a:r>
             <a:endParaRPr lang="en-US" dirty="0"/>
           </a:p>
         </p:txBody>
@@ -866,10 +631,6 @@
           <a:bodyPr/>
           <a:lstStyle/>
           <a:p>
-            <a:r>
-              <a:rPr lang="en-US" dirty="0"/>
-              <a:t/>
-            </a:r>
             <a:endParaRPr lang="en-US" dirty="0"/>
           </a:p>
         </p:txBody>
@@ -954,10 +715,6 @@
           <a:bodyPr/>
           <a:lstStyle/>
           <a:p>
-            <a:r>
-              <a:rPr lang="en-US" dirty="0"/>
-              <a:t/>
-            </a:r>
             <a:endParaRPr lang="en-US" dirty="0"/>
           </a:p>
         </p:txBody>
@@ -1042,10 +799,6 @@
           <a:bodyPr/>
           <a:lstStyle/>
           <a:p>
-            <a:r>
-              <a:rPr lang="en-US" dirty="0"/>
-              <a:t/>
-            </a:r>
             <a:endParaRPr lang="en-US" dirty="0"/>
           </a:p>
         </p:txBody>
@@ -1130,10 +883,6 @@
           <a:bodyPr/>
           <a:lstStyle/>
           <a:p>
-            <a:r>
-              <a:rPr lang="en-US" dirty="0"/>
-              <a:t/>
-            </a:r>
             <a:endParaRPr lang="en-US" dirty="0"/>
           </a:p>
         </p:txBody>
@@ -1218,10 +967,6 @@
           <a:bodyPr/>
           <a:lstStyle/>
           <a:p>
-            <a:r>
-              <a:rPr lang="en-US" dirty="0"/>
-              <a:t/>
-            </a:r>
             <a:endParaRPr lang="en-US" dirty="0"/>
           </a:p>
         </p:txBody>
@@ -1306,10 +1051,6 @@
           <a:bodyPr/>
           <a:lstStyle/>
           <a:p>
-            <a:r>
-              <a:rPr lang="en-US" dirty="0"/>
-              <a:t/>
-            </a:r>
             <a:endParaRPr lang="en-US" dirty="0"/>
           </a:p>
         </p:txBody>
@@ -1394,10 +1135,6 @@
           <a:bodyPr/>
           <a:lstStyle/>
           <a:p>
-            <a:r>
-              <a:rPr lang="en-US" dirty="0"/>
-              <a:t/>
-            </a:r>
             <a:endParaRPr lang="en-US" dirty="0"/>
           </a:p>
         </p:txBody>
@@ -1482,10 +1219,6 @@
           <a:bodyPr/>
           <a:lstStyle/>
           <a:p>
-            <a:r>
-              <a:rPr lang="en-US" dirty="0"/>
-              <a:t/>
-            </a:r>
             <a:endParaRPr lang="en-US" dirty="0"/>
           </a:p>
         </p:txBody>
@@ -1570,10 +1303,6 @@
           <a:bodyPr/>
           <a:lstStyle/>
           <a:p>
-            <a:r>
-              <a:rPr lang="en-US" dirty="0"/>
-              <a:t/>
-            </a:r>
             <a:endParaRPr lang="en-US" dirty="0"/>
           </a:p>
         </p:txBody>
@@ -1658,10 +1387,6 @@
           <a:bodyPr/>
           <a:lstStyle/>
           <a:p>
-            <a:r>
-              <a:rPr lang="en-US" dirty="0"/>
-              <a:t/>
-            </a:r>
             <a:endParaRPr lang="en-US" dirty="0"/>
           </a:p>
         </p:txBody>
@@ -1746,10 +1471,6 @@
           <a:bodyPr/>
           <a:lstStyle/>
           <a:p>
-            <a:r>
-              <a:rPr lang="en-US" dirty="0"/>
-              <a:t/>
-            </a:r>
             <a:endParaRPr lang="en-US" dirty="0"/>
           </a:p>
         </p:txBody>
@@ -1823,6 +1544,11 @@
 <file path=ppt/slideMasters/slideMaster1.xml><?xml version="1.0" encoding="utf-8"?>
 <p:sldMaster xmlns:a="http://schemas.openxmlformats.org/drawingml/2006/main" xmlns:r="http://schemas.openxmlformats.org/officeDocument/2006/relationships" xmlns:p="http://schemas.openxmlformats.org/presentationml/2006/main">
   <p:cSld>
+    <p:bg>
+      <p:bgRef idx="1001">
+        <a:schemeClr val="bg1"/>
+      </p:bgRef>
+    </p:bg>
     <p:spTree>
       <p:nvGrpSpPr>
         <p:cNvPr id="1" name=""/>
@@ -2105,6 +1831,7 @@
         <a:solidFill>
           <a:srgbClr val="0D1B4B"/>
         </a:solidFill>
+        <a:effectLst/>
       </p:bgPr>
     </p:bg>
     <p:spTree>
@@ -2167,7 +1894,7 @@
           <a:bodyPr wrap="square" rtlCol="0" anchor="ctr"/>
           <a:lstStyle/>
           <a:p>
-            <a:pPr indent="0" marL="0">
+            <a:pPr marL="0" indent="0">
               <a:buNone/>
             </a:pPr>
             <a:r>
@@ -2206,7 +1933,7 @@
           <a:bodyPr wrap="square" rtlCol="0" anchor="ctr"/>
           <a:lstStyle/>
           <a:p>
-            <a:pPr indent="0" marL="0">
+            <a:pPr marL="0" indent="0">
               <a:buNone/>
             </a:pPr>
             <a:r>
@@ -2270,7 +1997,7 @@
           <a:bodyPr wrap="square" rtlCol="0" anchor="ctr"/>
           <a:lstStyle/>
           <a:p>
-            <a:pPr indent="0" marL="0">
+            <a:pPr marL="0" indent="0">
               <a:buNone/>
             </a:pPr>
             <a:r>
@@ -2336,7 +2063,7 @@
           <a:bodyPr wrap="square" rtlCol="0" anchor="b"/>
           <a:lstStyle/>
           <a:p>
-            <a:pPr algn="ctr" indent="0" marL="0">
+            <a:pPr marL="0" indent="0" algn="ctr">
               <a:buNone/>
             </a:pPr>
             <a:r>
@@ -2372,7 +2099,7 @@
           <a:bodyPr wrap="square" rtlCol="0" anchor="t"/>
           <a:lstStyle/>
           <a:p>
-            <a:pPr algn="ctr" indent="0" marL="0">
+            <a:pPr marL="0" indent="0" algn="ctr">
               <a:buNone/>
             </a:pPr>
             <a:r>
@@ -2435,7 +2162,7 @@
           <a:bodyPr wrap="square" rtlCol="0" anchor="b"/>
           <a:lstStyle/>
           <a:p>
-            <a:pPr algn="ctr" indent="0" marL="0">
+            <a:pPr marL="0" indent="0" algn="ctr">
               <a:buNone/>
             </a:pPr>
             <a:r>
@@ -2471,7 +2198,7 @@
           <a:bodyPr wrap="square" rtlCol="0" anchor="t"/>
           <a:lstStyle/>
           <a:p>
-            <a:pPr algn="ctr" indent="0" marL="0">
+            <a:pPr marL="0" indent="0" algn="ctr">
               <a:buNone/>
             </a:pPr>
             <a:r>
@@ -2534,7 +2261,7 @@
           <a:bodyPr wrap="square" rtlCol="0" anchor="b"/>
           <a:lstStyle/>
           <a:p>
-            <a:pPr algn="ctr" indent="0" marL="0">
+            <a:pPr marL="0" indent="0" algn="ctr">
               <a:buNone/>
             </a:pPr>
             <a:r>
@@ -2570,7 +2297,7 @@
           <a:bodyPr wrap="square" rtlCol="0" anchor="t"/>
           <a:lstStyle/>
           <a:p>
-            <a:pPr algn="ctr" indent="0" marL="0">
+            <a:pPr marL="0" indent="0" algn="ctr">
               <a:buNone/>
             </a:pPr>
             <a:r>
@@ -2633,7 +2360,7 @@
           <a:bodyPr wrap="square" rtlCol="0" anchor="b"/>
           <a:lstStyle/>
           <a:p>
-            <a:pPr algn="ctr" indent="0" marL="0">
+            <a:pPr marL="0" indent="0" algn="ctr">
               <a:buNone/>
             </a:pPr>
             <a:r>
@@ -2669,7 +2396,7 @@
           <a:bodyPr wrap="square" rtlCol="0" anchor="t"/>
           <a:lstStyle/>
           <a:p>
-            <a:pPr algn="ctr" indent="0" marL="0">
+            <a:pPr marL="0" indent="0" algn="ctr">
               <a:buNone/>
             </a:pPr>
             <a:r>
@@ -2705,7 +2432,7 @@
           <a:bodyPr wrap="square" rtlCol="0" anchor="ctr"/>
           <a:lstStyle/>
           <a:p>
-            <a:pPr algn="ctr" indent="0" marL="0">
+            <a:pPr marL="0" indent="0" algn="ctr">
               <a:buNone/>
             </a:pPr>
             <a:r>
@@ -2736,6 +2463,7 @@
         <a:solidFill>
           <a:srgbClr val="F4F8FA"/>
         </a:solidFill>
+        <a:effectLst/>
       </p:bgPr>
     </p:bg>
     <p:spTree>
@@ -2825,7 +2553,7 @@
           <a:bodyPr wrap="square" lIns="0" tIns="0" rIns="0" bIns="0" rtlCol="0" anchor="ctr"/>
           <a:lstStyle/>
           <a:p>
-            <a:pPr algn="ctr" indent="0" marL="0">
+            <a:pPr marL="0" indent="0" algn="ctr">
               <a:buNone/>
             </a:pPr>
             <a:r>
@@ -2861,7 +2589,7 @@
           <a:bodyPr wrap="square" rtlCol="0" anchor="ctr"/>
           <a:lstStyle/>
           <a:p>
-            <a:pPr indent="0" marL="0">
+            <a:pPr marL="0" indent="0">
               <a:buNone/>
             </a:pPr>
             <a:r>
@@ -2903,7 +2631,7 @@
             <a:prstDash val="solid"/>
           </a:ln>
           <a:effectLst>
-            <a:outerShdw sx="100000" sy="100000" kx="0" ky="0" algn="bl" rotWithShape="0" blurRad="101600" dist="38100" dir="8100000">
+            <a:outerShdw blurRad="101600" dist="38100" dir="8100000" algn="bl" rotWithShape="0">
               <a:srgbClr val="000000">
                 <a:alpha val="12000"/>
               </a:srgbClr>
@@ -2957,7 +2685,7 @@
           <a:bodyPr wrap="square" rtlCol="0" anchor="ctr"/>
           <a:lstStyle/>
           <a:p>
-            <a:pPr indent="0" marL="0">
+            <a:pPr marL="0" indent="0">
               <a:buNone/>
             </a:pPr>
             <a:r>
@@ -2993,7 +2721,7 @@
           <a:bodyPr wrap="square" rtlCol="0" anchor="ctr"/>
           <a:lstStyle/>
           <a:p>
-            <a:pPr indent="0" marL="0">
+            <a:pPr marL="0" indent="0">
               <a:buNone/>
             </a:pPr>
             <a:r>
@@ -3029,7 +2757,7 @@
           <a:bodyPr wrap="square" rtlCol="0" anchor="ctr"/>
           <a:lstStyle/>
           <a:p>
-            <a:pPr indent="0" marL="0">
+            <a:pPr marL="0" indent="0">
               <a:buNone/>
             </a:pPr>
             <a:r>
@@ -3094,7 +2822,7 @@
           <a:bodyPr wrap="square" rtlCol="0" anchor="ctr"/>
           <a:lstStyle/>
           <a:p>
-            <a:pPr indent="0" marL="0">
+            <a:pPr marL="0" indent="0">
               <a:buNone/>
             </a:pPr>
             <a:r>
@@ -3133,7 +2861,7 @@
           <a:bodyPr wrap="square" rtlCol="0" anchor="ctr"/>
           <a:lstStyle/>
           <a:p>
-            <a:pPr indent="0" marL="0">
+            <a:pPr marL="0" indent="0">
               <a:buNone/>
             </a:pPr>
             <a:r>
@@ -3169,7 +2897,7 @@
           <a:bodyPr wrap="square" rtlCol="0" anchor="ctr"/>
           <a:lstStyle/>
           <a:p>
-            <a:pPr indent="0" marL="0">
+            <a:pPr marL="0" indent="0">
               <a:buNone/>
             </a:pPr>
             <a:r>
@@ -3205,7 +2933,7 @@
           <a:bodyPr wrap="square" rtlCol="0" anchor="ctr"/>
           <a:lstStyle/>
           <a:p>
-            <a:pPr indent="0" marL="0">
+            <a:pPr marL="0" indent="0">
               <a:buNone/>
             </a:pPr>
             <a:r>
@@ -3241,7 +2969,7 @@
           <a:bodyPr wrap="square" rtlCol="0" anchor="ctr"/>
           <a:lstStyle/>
           <a:p>
-            <a:pPr indent="0" marL="0">
+            <a:pPr marL="0" indent="0">
               <a:buNone/>
             </a:pPr>
             <a:r>
@@ -3277,7 +3005,7 @@
           <a:bodyPr wrap="square" rtlCol="0" anchor="ctr"/>
           <a:lstStyle/>
           <a:p>
-            <a:pPr indent="0" marL="0">
+            <a:pPr marL="0" indent="0">
               <a:buNone/>
             </a:pPr>
             <a:r>
@@ -3313,7 +3041,7 @@
           <a:bodyPr wrap="square" rtlCol="0" anchor="ctr"/>
           <a:lstStyle/>
           <a:p>
-            <a:pPr indent="0" marL="0">
+            <a:pPr marL="0" indent="0">
               <a:buNone/>
             </a:pPr>
             <a:r>
@@ -3378,7 +3106,7 @@
           <a:bodyPr wrap="square" rtlCol="0" anchor="ctr"/>
           <a:lstStyle/>
           <a:p>
-            <a:pPr indent="0" marL="0">
+            <a:pPr marL="0" indent="0">
               <a:buNone/>
             </a:pPr>
             <a:r>
@@ -3417,7 +3145,7 @@
             <a:prstDash val="solid"/>
           </a:ln>
           <a:effectLst>
-            <a:outerShdw sx="100000" sy="100000" kx="0" ky="0" algn="bl" rotWithShape="0" blurRad="101600" dist="38100" dir="8100000">
+            <a:outerShdw blurRad="101600" dist="38100" dir="8100000" algn="bl" rotWithShape="0">
               <a:srgbClr val="000000">
                 <a:alpha val="12000"/>
               </a:srgbClr>
@@ -3471,7 +3199,7 @@
           <a:bodyPr wrap="square" rtlCol="0" anchor="ctr"/>
           <a:lstStyle/>
           <a:p>
-            <a:pPr indent="0" marL="0">
+            <a:pPr marL="0" indent="0">
               <a:buNone/>
             </a:pPr>
             <a:r>
@@ -3507,7 +3235,7 @@
           <a:bodyPr wrap="square" rtlCol="0" anchor="ctr"/>
           <a:lstStyle/>
           <a:p>
-            <a:pPr indent="0" marL="0">
+            <a:pPr marL="0" indent="0">
               <a:buNone/>
             </a:pPr>
             <a:r>
@@ -3543,7 +3271,7 @@
           <a:bodyPr wrap="square" rtlCol="0" anchor="ctr"/>
           <a:lstStyle/>
           <a:p>
-            <a:pPr indent="0" marL="0">
+            <a:pPr marL="0" indent="0">
               <a:buNone/>
             </a:pPr>
             <a:r>
@@ -3608,7 +3336,7 @@
           <a:bodyPr wrap="square" rtlCol="0" anchor="ctr"/>
           <a:lstStyle/>
           <a:p>
-            <a:pPr indent="0" marL="0">
+            <a:pPr marL="0" indent="0">
               <a:buNone/>
             </a:pPr>
             <a:r>
@@ -3676,7 +3404,7 @@
           <a:bodyPr wrap="square" rtlCol="0" anchor="ctr"/>
           <a:lstStyle/>
           <a:p>
-            <a:pPr indent="0" marL="0">
+            <a:pPr marL="0" indent="0">
               <a:buNone/>
             </a:pPr>
             <a:r>
@@ -3744,7 +3472,7 @@
           <a:bodyPr wrap="square" rtlCol="0" anchor="ctr"/>
           <a:lstStyle/>
           <a:p>
-            <a:pPr indent="0" marL="0">
+            <a:pPr marL="0" indent="0">
               <a:buNone/>
             </a:pPr>
             <a:r>
@@ -3812,7 +3540,7 @@
           <a:bodyPr wrap="square" rtlCol="0" anchor="ctr"/>
           <a:lstStyle/>
           <a:p>
-            <a:pPr indent="0" marL="0">
+            <a:pPr marL="0" indent="0">
               <a:buNone/>
             </a:pPr>
             <a:r>
@@ -3851,7 +3579,7 @@
           <a:bodyPr wrap="square" rtlCol="0" anchor="ctr"/>
           <a:lstStyle/>
           <a:p>
-            <a:pPr indent="0" marL="0">
+            <a:pPr marL="0" indent="0">
               <a:buNone/>
             </a:pPr>
             <a:r>
@@ -3887,7 +3615,7 @@
           <a:bodyPr wrap="square" rtlCol="0" anchor="ctr"/>
           <a:lstStyle/>
           <a:p>
-            <a:pPr indent="0" marL="0">
+            <a:pPr marL="0" indent="0">
               <a:buNone/>
             </a:pPr>
             <a:r>
@@ -3923,7 +3651,7 @@
           <a:bodyPr wrap="square" rtlCol="0" anchor="ctr"/>
           <a:lstStyle/>
           <a:p>
-            <a:pPr indent="0" marL="0">
+            <a:pPr marL="0" indent="0">
               <a:buNone/>
             </a:pPr>
             <a:r>
@@ -3959,7 +3687,7 @@
           <a:bodyPr wrap="square" rtlCol="0" anchor="ctr"/>
           <a:lstStyle/>
           <a:p>
-            <a:pPr indent="0" marL="0">
+            <a:pPr marL="0" indent="0">
               <a:buNone/>
             </a:pPr>
             <a:r>
@@ -3995,7 +3723,7 @@
           <a:bodyPr wrap="square" rtlCol="0" anchor="ctr"/>
           <a:lstStyle/>
           <a:p>
-            <a:pPr indent="0" marL="0">
+            <a:pPr marL="0" indent="0">
               <a:buNone/>
             </a:pPr>
             <a:r>
@@ -4031,7 +3759,7 @@
           <a:bodyPr wrap="square" rtlCol="0" anchor="ctr"/>
           <a:lstStyle/>
           <a:p>
-            <a:pPr algn="r" indent="0" marL="0">
+            <a:pPr marL="0" indent="0" algn="r">
               <a:buNone/>
             </a:pPr>
             <a:r>
@@ -4062,6 +3790,7 @@
         <a:solidFill>
           <a:srgbClr val="F4F8FA"/>
         </a:solidFill>
+        <a:effectLst/>
       </p:bgPr>
     </p:bg>
     <p:spTree>
@@ -4151,7 +3880,7 @@
           <a:bodyPr wrap="square" lIns="0" tIns="0" rIns="0" bIns="0" rtlCol="0" anchor="ctr"/>
           <a:lstStyle/>
           <a:p>
-            <a:pPr algn="ctr" indent="0" marL="0">
+            <a:pPr marL="0" indent="0" algn="ctr">
               <a:buNone/>
             </a:pPr>
             <a:r>
@@ -4187,7 +3916,7 @@
           <a:bodyPr wrap="square" rtlCol="0" anchor="ctr"/>
           <a:lstStyle/>
           <a:p>
-            <a:pPr indent="0" marL="0">
+            <a:pPr marL="0" indent="0">
               <a:buNone/>
             </a:pPr>
             <a:r>
@@ -4229,7 +3958,7 @@
             <a:prstDash val="solid"/>
           </a:ln>
           <a:effectLst>
-            <a:outerShdw sx="100000" sy="100000" kx="0" ky="0" algn="bl" rotWithShape="0" blurRad="101600" dist="38100" dir="8100000">
+            <a:outerShdw blurRad="101600" dist="38100" dir="8100000" algn="bl" rotWithShape="0">
               <a:srgbClr val="000000">
                 <a:alpha val="12000"/>
               </a:srgbClr>
@@ -4283,7 +4012,7 @@
           <a:bodyPr wrap="square" rtlCol="0" anchor="ctr"/>
           <a:lstStyle/>
           <a:p>
-            <a:pPr indent="0" marL="0">
+            <a:pPr marL="0" indent="0">
               <a:buNone/>
             </a:pPr>
             <a:r>
@@ -4319,7 +4048,7 @@
           <a:bodyPr wrap="square" rtlCol="0" anchor="ctr"/>
           <a:lstStyle/>
           <a:p>
-            <a:pPr indent="0" marL="0">
+            <a:pPr marL="0" indent="0">
               <a:buNone/>
             </a:pPr>
             <a:r>
@@ -4355,7 +4084,7 @@
           <a:bodyPr wrap="square" rtlCol="0" anchor="ctr"/>
           <a:lstStyle/>
           <a:p>
-            <a:pPr indent="0" marL="0">
+            <a:pPr marL="0" indent="0">
               <a:buNone/>
             </a:pPr>
             <a:r>
@@ -4420,7 +4149,7 @@
           <a:bodyPr wrap="square" rtlCol="0" anchor="ctr"/>
           <a:lstStyle/>
           <a:p>
-            <a:pPr indent="0" marL="0">
+            <a:pPr marL="0" indent="0">
               <a:buNone/>
             </a:pPr>
             <a:r>
@@ -4437,7 +4166,7 @@
             <a:endParaRPr lang="en-US" sz="950" dirty="0"/>
           </a:p>
           <a:p>
-            <a:pPr indent="0" marL="0">
+            <a:pPr marL="0" indent="0">
               <a:buNone/>
             </a:pPr>
             <a:r>
@@ -4479,7 +4208,7 @@
             <a:prstDash val="solid"/>
           </a:ln>
           <a:effectLst>
-            <a:outerShdw sx="100000" sy="100000" kx="0" ky="0" algn="bl" rotWithShape="0" blurRad="101600" dist="38100" dir="8100000">
+            <a:outerShdw blurRad="101600" dist="38100" dir="8100000" algn="bl" rotWithShape="0">
               <a:srgbClr val="000000">
                 <a:alpha val="12000"/>
               </a:srgbClr>
@@ -4533,7 +4262,7 @@
           <a:bodyPr wrap="square" rtlCol="0" anchor="ctr"/>
           <a:lstStyle/>
           <a:p>
-            <a:pPr indent="0" marL="0">
+            <a:pPr marL="0" indent="0">
               <a:buNone/>
             </a:pPr>
             <a:r>
@@ -4569,7 +4298,7 @@
           <a:bodyPr wrap="square" rtlCol="0" anchor="ctr"/>
           <a:lstStyle/>
           <a:p>
-            <a:pPr indent="0" marL="0">
+            <a:pPr marL="0" indent="0">
               <a:buNone/>
             </a:pPr>
             <a:r>
@@ -4605,7 +4334,7 @@
           <a:bodyPr wrap="square" rtlCol="0" anchor="ctr"/>
           <a:lstStyle/>
           <a:p>
-            <a:pPr indent="0" marL="0">
+            <a:pPr marL="0" indent="0">
               <a:buNone/>
             </a:pPr>
             <a:r>
@@ -4670,7 +4399,7 @@
           <a:bodyPr wrap="square" rtlCol="0" anchor="ctr"/>
           <a:lstStyle/>
           <a:p>
-            <a:pPr indent="0" marL="0">
+            <a:pPr marL="0" indent="0">
               <a:buNone/>
             </a:pPr>
             <a:r>
@@ -4687,7 +4416,7 @@
             <a:endParaRPr lang="en-US" sz="950" dirty="0"/>
           </a:p>
           <a:p>
-            <a:pPr indent="0" marL="0">
+            <a:pPr marL="0" indent="0">
               <a:buNone/>
             </a:pPr>
             <a:r>
@@ -4729,7 +4458,7 @@
             <a:prstDash val="solid"/>
           </a:ln>
           <a:effectLst>
-            <a:outerShdw sx="100000" sy="100000" kx="0" ky="0" algn="bl" rotWithShape="0" blurRad="101600" dist="38100" dir="8100000">
+            <a:outerShdw blurRad="101600" dist="38100" dir="8100000" algn="bl" rotWithShape="0">
               <a:srgbClr val="000000">
                 <a:alpha val="12000"/>
               </a:srgbClr>
@@ -4783,7 +4512,7 @@
           <a:bodyPr wrap="square" rtlCol="0" anchor="ctr"/>
           <a:lstStyle/>
           <a:p>
-            <a:pPr indent="0" marL="0">
+            <a:pPr marL="0" indent="0">
               <a:buNone/>
             </a:pPr>
             <a:r>
@@ -4819,7 +4548,7 @@
           <a:bodyPr wrap="square" rtlCol="0" anchor="ctr"/>
           <a:lstStyle/>
           <a:p>
-            <a:pPr indent="0" marL="0">
+            <a:pPr marL="0" indent="0">
               <a:buNone/>
             </a:pPr>
             <a:r>
@@ -4855,7 +4584,7 @@
           <a:bodyPr wrap="square" rtlCol="0" anchor="ctr"/>
           <a:lstStyle/>
           <a:p>
-            <a:pPr indent="0" marL="0">
+            <a:pPr marL="0" indent="0">
               <a:buNone/>
             </a:pPr>
             <a:r>
@@ -4920,7 +4649,7 @@
           <a:bodyPr wrap="square" rtlCol="0" anchor="ctr"/>
           <a:lstStyle/>
           <a:p>
-            <a:pPr indent="0" marL="0">
+            <a:pPr marL="0" indent="0">
               <a:buNone/>
             </a:pPr>
             <a:r>
@@ -4937,7 +4666,7 @@
             <a:endParaRPr lang="en-US" sz="950" dirty="0"/>
           </a:p>
           <a:p>
-            <a:pPr indent="0" marL="0">
+            <a:pPr marL="0" indent="0">
               <a:buNone/>
             </a:pPr>
             <a:r>
@@ -4979,7 +4708,7 @@
             <a:prstDash val="solid"/>
           </a:ln>
           <a:effectLst>
-            <a:outerShdw sx="100000" sy="100000" kx="0" ky="0" algn="bl" rotWithShape="0" blurRad="101600" dist="38100" dir="8100000">
+            <a:outerShdw blurRad="101600" dist="38100" dir="8100000" algn="bl" rotWithShape="0">
               <a:srgbClr val="000000">
                 <a:alpha val="12000"/>
               </a:srgbClr>
@@ -5033,7 +4762,7 @@
           <a:bodyPr wrap="square" rtlCol="0" anchor="ctr"/>
           <a:lstStyle/>
           <a:p>
-            <a:pPr indent="0" marL="0">
+            <a:pPr marL="0" indent="0">
               <a:buNone/>
             </a:pPr>
             <a:r>
@@ -5069,7 +4798,7 @@
           <a:bodyPr wrap="square" rtlCol="0" anchor="ctr"/>
           <a:lstStyle/>
           <a:p>
-            <a:pPr indent="0" marL="0">
+            <a:pPr marL="0" indent="0">
               <a:buNone/>
             </a:pPr>
             <a:r>
@@ -5105,7 +4834,7 @@
           <a:bodyPr wrap="square" rtlCol="0" anchor="ctr"/>
           <a:lstStyle/>
           <a:p>
-            <a:pPr indent="0" marL="0">
+            <a:pPr marL="0" indent="0">
               <a:buNone/>
             </a:pPr>
             <a:r>
@@ -5170,7 +4899,7 @@
           <a:bodyPr wrap="square" rtlCol="0" anchor="ctr"/>
           <a:lstStyle/>
           <a:p>
-            <a:pPr indent="0" marL="0">
+            <a:pPr marL="0" indent="0">
               <a:buNone/>
             </a:pPr>
             <a:r>
@@ -5187,7 +4916,7 @@
             <a:endParaRPr lang="en-US" sz="950" dirty="0"/>
           </a:p>
           <a:p>
-            <a:pPr indent="0" marL="0">
+            <a:pPr marL="0" indent="0">
               <a:buNone/>
             </a:pPr>
             <a:r>
@@ -5204,7 +4933,7 @@
             <a:endParaRPr lang="en-US" sz="950" dirty="0"/>
           </a:p>
           <a:p>
-            <a:pPr indent="0" marL="0">
+            <a:pPr marL="0" indent="0">
               <a:buNone/>
             </a:pPr>
             <a:r>
@@ -5243,7 +4972,7 @@
           <a:bodyPr wrap="square" rtlCol="0" anchor="ctr"/>
           <a:lstStyle/>
           <a:p>
-            <a:pPr algn="r" indent="0" marL="0">
+            <a:pPr marL="0" indent="0" algn="r">
               <a:buNone/>
             </a:pPr>
             <a:r>
@@ -5274,6 +5003,7 @@
         <a:solidFill>
           <a:srgbClr val="F4F8FA"/>
         </a:solidFill>
+        <a:effectLst/>
       </p:bgPr>
     </p:bg>
     <p:spTree>
@@ -5363,7 +5093,7 @@
           <a:bodyPr wrap="square" lIns="0" tIns="0" rIns="0" bIns="0" rtlCol="0" anchor="ctr"/>
           <a:lstStyle/>
           <a:p>
-            <a:pPr algn="ctr" indent="0" marL="0">
+            <a:pPr marL="0" indent="0" algn="ctr">
               <a:buNone/>
             </a:pPr>
             <a:r>
@@ -5399,7 +5129,7 @@
           <a:bodyPr wrap="square" rtlCol="0" anchor="ctr"/>
           <a:lstStyle/>
           <a:p>
-            <a:pPr indent="0" marL="0">
+            <a:pPr marL="0" indent="0">
               <a:buNone/>
             </a:pPr>
             <a:r>
@@ -5411,7 +5141,51 @@
                 <a:ea typeface="Trebuchet MS" pitchFamily="34" charset="-122"/>
                 <a:cs typeface="Trebuchet MS" pitchFamily="34" charset="-120"/>
               </a:rPr>
-              <a:t>Agents — 4 persona chuyên biệt</a:t>
+              <a:t>Agents </a:t>
+            </a:r>
+            <a:r>
+              <a:rPr lang="en-US" sz="2400" b="1">
+                <a:solidFill>
+                  <a:srgbClr val="0D1B4B"/>
+                </a:solidFill>
+                <a:latin typeface="Trebuchet MS" pitchFamily="34" charset="0"/>
+                <a:ea typeface="Trebuchet MS" pitchFamily="34" charset="-122"/>
+                <a:cs typeface="Trebuchet MS" pitchFamily="34" charset="-120"/>
+              </a:rPr>
+              <a:t>— </a:t>
+            </a:r>
+            <a:r>
+              <a:rPr lang="vi-VN" sz="2400" b="1">
+                <a:solidFill>
+                  <a:srgbClr val="0D1B4B"/>
+                </a:solidFill>
+                <a:latin typeface="Trebuchet MS" pitchFamily="34" charset="0"/>
+                <a:ea typeface="Trebuchet MS" pitchFamily="34" charset="-122"/>
+                <a:cs typeface="Trebuchet MS" pitchFamily="34" charset="-120"/>
+              </a:rPr>
+              <a:t>3</a:t>
+            </a:r>
+            <a:r>
+              <a:rPr lang="en-US" sz="2400" b="1">
+                <a:solidFill>
+                  <a:srgbClr val="0D1B4B"/>
+                </a:solidFill>
+                <a:latin typeface="Trebuchet MS" pitchFamily="34" charset="0"/>
+                <a:ea typeface="Trebuchet MS" pitchFamily="34" charset="-122"/>
+                <a:cs typeface="Trebuchet MS" pitchFamily="34" charset="-120"/>
+              </a:rPr>
+              <a:t> </a:t>
+            </a:r>
+            <a:r>
+              <a:rPr lang="en-US" sz="2400" b="1" dirty="0">
+                <a:solidFill>
+                  <a:srgbClr val="0D1B4B"/>
+                </a:solidFill>
+                <a:latin typeface="Trebuchet MS" pitchFamily="34" charset="0"/>
+                <a:ea typeface="Trebuchet MS" pitchFamily="34" charset="-122"/>
+                <a:cs typeface="Trebuchet MS" pitchFamily="34" charset="-120"/>
+              </a:rPr>
+              <a:t>persona chuyên biệt</a:t>
             </a:r>
             <a:endParaRPr lang="en-US" sz="2400" dirty="0"/>
           </a:p>
@@ -5438,7 +5212,7 @@
           <a:bodyPr wrap="square" rtlCol="0" anchor="ctr"/>
           <a:lstStyle/>
           <a:p>
-            <a:pPr indent="0" marL="0">
+            <a:pPr marL="0" indent="0">
               <a:buNone/>
             </a:pPr>
             <a:r>
@@ -5477,7 +5251,7 @@
             <a:prstDash val="solid"/>
           </a:ln>
           <a:effectLst>
-            <a:outerShdw sx="100000" sy="100000" kx="0" ky="0" algn="bl" rotWithShape="0" blurRad="101600" dist="38100" dir="8100000">
+            <a:outerShdw blurRad="101600" dist="38100" dir="8100000" algn="bl" rotWithShape="0">
               <a:srgbClr val="000000">
                 <a:alpha val="12000"/>
               </a:srgbClr>
@@ -5531,7 +5305,7 @@
           <a:bodyPr wrap="square" rtlCol="0" anchor="ctr"/>
           <a:lstStyle/>
           <a:p>
-            <a:pPr indent="0" marL="0">
+            <a:pPr marL="0" indent="0">
               <a:buNone/>
             </a:pPr>
             <a:r>
@@ -5567,7 +5341,7 @@
           <a:bodyPr wrap="square" rtlCol="0" anchor="ctr"/>
           <a:lstStyle/>
           <a:p>
-            <a:pPr indent="0" marL="0">
+            <a:pPr marL="0" indent="0">
               <a:buNone/>
             </a:pPr>
             <a:r>
@@ -5603,7 +5377,7 @@
           <a:bodyPr wrap="square" rtlCol="0" anchor="ctr"/>
           <a:lstStyle/>
           <a:p>
-            <a:pPr indent="0" marL="0">
+            <a:pPr marL="0" indent="0">
               <a:buNone/>
             </a:pPr>
             <a:r>
@@ -5639,7 +5413,7 @@
           <a:bodyPr wrap="square" rtlCol="0" anchor="ctr"/>
           <a:lstStyle/>
           <a:p>
-            <a:pPr indent="0" marL="0">
+            <a:pPr marL="0" indent="0">
               <a:buNone/>
             </a:pPr>
             <a:r>
@@ -5675,7 +5449,7 @@
           <a:bodyPr wrap="square" rtlCol="0" anchor="ctr"/>
           <a:lstStyle/>
           <a:p>
-            <a:pPr indent="0" marL="0">
+            <a:pPr marL="0" indent="0">
               <a:buNone/>
             </a:pPr>
             <a:r>
@@ -5711,7 +5485,7 @@
           <a:bodyPr wrap="square" rtlCol="0" anchor="ctr"/>
           <a:lstStyle/>
           <a:p>
-            <a:pPr indent="0" marL="0">
+            <a:pPr marL="0" indent="0">
               <a:buNone/>
             </a:pPr>
             <a:r>
@@ -5750,7 +5524,7 @@
             <a:prstDash val="solid"/>
           </a:ln>
           <a:effectLst>
-            <a:outerShdw sx="100000" sy="100000" kx="0" ky="0" algn="bl" rotWithShape="0" blurRad="101600" dist="38100" dir="8100000">
+            <a:outerShdw blurRad="101600" dist="38100" dir="8100000" algn="bl" rotWithShape="0">
               <a:srgbClr val="000000">
                 <a:alpha val="12000"/>
               </a:srgbClr>
@@ -5804,7 +5578,7 @@
           <a:bodyPr wrap="square" rtlCol="0" anchor="ctr"/>
           <a:lstStyle/>
           <a:p>
-            <a:pPr indent="0" marL="0">
+            <a:pPr marL="0" indent="0">
               <a:buNone/>
             </a:pPr>
             <a:r>
@@ -5840,7 +5614,7 @@
           <a:bodyPr wrap="square" rtlCol="0" anchor="ctr"/>
           <a:lstStyle/>
           <a:p>
-            <a:pPr indent="0" marL="0">
+            <a:pPr marL="0" indent="0">
               <a:buNone/>
             </a:pPr>
             <a:r>
@@ -5876,7 +5650,7 @@
           <a:bodyPr wrap="square" rtlCol="0" anchor="ctr"/>
           <a:lstStyle/>
           <a:p>
-            <a:pPr indent="0" marL="0">
+            <a:pPr marL="0" indent="0">
               <a:buNone/>
             </a:pPr>
             <a:r>
@@ -5912,7 +5686,7 @@
           <a:bodyPr wrap="square" rtlCol="0" anchor="ctr"/>
           <a:lstStyle/>
           <a:p>
-            <a:pPr indent="0" marL="0">
+            <a:pPr marL="0" indent="0">
               <a:buNone/>
             </a:pPr>
             <a:r>
@@ -5948,7 +5722,7 @@
           <a:bodyPr wrap="square" rtlCol="0" anchor="ctr"/>
           <a:lstStyle/>
           <a:p>
-            <a:pPr indent="0" marL="0">
+            <a:pPr marL="0" indent="0">
               <a:buNone/>
             </a:pPr>
             <a:r>
@@ -5984,7 +5758,7 @@
           <a:bodyPr wrap="square" rtlCol="0" anchor="ctr"/>
           <a:lstStyle/>
           <a:p>
-            <a:pPr indent="0" marL="0">
+            <a:pPr marL="0" indent="0">
               <a:buNone/>
             </a:pPr>
             <a:r>
@@ -6001,13 +5775,13 @@
       </p:sp>
       <p:sp>
         <p:nvSpPr>
-          <p:cNvPr id="23" name="Shape 21"/>
-          <p:cNvSpPr/>
-          <p:nvPr/>
-        </p:nvSpPr>
-        <p:spPr>
-          <a:xfrm>
-            <a:off x="320040" y="3154680"/>
+          <p:cNvPr id="31" name="Shape 29"/>
+          <p:cNvSpPr/>
+          <p:nvPr/>
+        </p:nvSpPr>
+        <p:spPr>
+          <a:xfrm>
+            <a:off x="2584033" y="3154680"/>
             <a:ext cx="4160520" cy="1709928"/>
           </a:xfrm>
           <a:prstGeom prst="rect">
@@ -6023,7 +5797,7 @@
             <a:prstDash val="solid"/>
           </a:ln>
           <a:effectLst>
-            <a:outerShdw sx="100000" sy="100000" kx="0" ky="0" algn="bl" rotWithShape="0" blurRad="101600" dist="38100" dir="8100000">
+            <a:outerShdw blurRad="101600" dist="38100" dir="8100000" algn="bl" rotWithShape="0">
               <a:srgbClr val="000000">
                 <a:alpha val="12000"/>
               </a:srgbClr>
@@ -6033,38 +5807,38 @@
       </p:sp>
       <p:sp>
         <p:nvSpPr>
-          <p:cNvPr id="24" name="Shape 22"/>
-          <p:cNvSpPr/>
-          <p:nvPr/>
-        </p:nvSpPr>
-        <p:spPr>
-          <a:xfrm>
-            <a:off x="320040" y="3154680"/>
+          <p:cNvPr id="32" name="Shape 30"/>
+          <p:cNvSpPr/>
+          <p:nvPr/>
+        </p:nvSpPr>
+        <p:spPr>
+          <a:xfrm>
+            <a:off x="2584033" y="3154680"/>
             <a:ext cx="64008" cy="1709928"/>
           </a:xfrm>
           <a:prstGeom prst="rect">
             <a:avLst/>
           </a:prstGeom>
           <a:solidFill>
-            <a:srgbClr val="7C5CBF"/>
-          </a:solidFill>
-          <a:ln w="12700">
-            <a:solidFill>
-              <a:srgbClr val="7C5CBF"/>
-            </a:solidFill>
-            <a:prstDash val="solid"/>
-          </a:ln>
-        </p:spPr>
-      </p:sp>
-      <p:sp>
-        <p:nvSpPr>
-          <p:cNvPr id="25" name="Text 23"/>
-          <p:cNvSpPr/>
-          <p:nvPr/>
-        </p:nvSpPr>
-        <p:spPr>
-          <a:xfrm>
-            <a:off x="502920" y="3172968"/>
+            <a:srgbClr val="F4A261"/>
+          </a:solidFill>
+          <a:ln w="12700">
+            <a:solidFill>
+              <a:srgbClr val="F4A261"/>
+            </a:solidFill>
+            <a:prstDash val="solid"/>
+          </a:ln>
+        </p:spPr>
+      </p:sp>
+      <p:sp>
+        <p:nvSpPr>
+          <p:cNvPr id="33" name="Text 31"/>
+          <p:cNvSpPr/>
+          <p:nvPr/>
+        </p:nvSpPr>
+        <p:spPr>
+          <a:xfrm>
+            <a:off x="2766913" y="3172968"/>
             <a:ext cx="3291840" cy="320040"/>
           </a:xfrm>
           <a:prstGeom prst="rect">
@@ -6077,16 +5851,16 @@
           <a:bodyPr wrap="square" rtlCol="0" anchor="ctr"/>
           <a:lstStyle/>
           <a:p>
-            <a:pPr indent="0" marL="0">
+            <a:pPr marL="0" indent="0">
               <a:buNone/>
             </a:pPr>
             <a:r>
               <a:rPr lang="en-US" sz="1300" b="1" dirty="0">
                 <a:solidFill>
-                  <a:srgbClr val="7C5CBF"/>
-                </a:solidFill>
-              </a:rPr>
-              <a:t>📚  myfiles-reference.md</a:t>
+                  <a:srgbClr val="F4A261"/>
+                </a:solidFill>
+              </a:rPr>
+              <a:t>♻️  refactor-assistant.md</a:t>
             </a:r>
             <a:endParaRPr lang="en-US" sz="1300" dirty="0"/>
           </a:p>
@@ -6094,13 +5868,13 @@
       </p:sp>
       <p:sp>
         <p:nvSpPr>
-          <p:cNvPr id="26" name="Text 24"/>
-          <p:cNvSpPr/>
-          <p:nvPr/>
-        </p:nvSpPr>
-        <p:spPr>
-          <a:xfrm>
-            <a:off x="502920" y="3483864"/>
+          <p:cNvPr id="34" name="Text 32"/>
+          <p:cNvSpPr/>
+          <p:nvPr/>
+        </p:nvSpPr>
+        <p:spPr>
+          <a:xfrm>
+            <a:off x="2766913" y="3483864"/>
             <a:ext cx="3794760" cy="228600"/>
           </a:xfrm>
           <a:prstGeom prst="rect">
@@ -6113,7 +5887,7 @@
           <a:bodyPr wrap="square" rtlCol="0" anchor="ctr"/>
           <a:lstStyle/>
           <a:p>
-            <a:pPr indent="0" marL="0">
+            <a:pPr marL="0" indent="0">
               <a:buNone/>
             </a:pPr>
             <a:r>
@@ -6122,7 +5896,7 @@
                   <a:srgbClr val="6B7A8D"/>
                 </a:solidFill>
               </a:rPr>
-              <a:t>Tools: Read · Grep · Glob · Bash</a:t>
+              <a:t>Tools: Read · Edit · Grep · Glob · Bash</a:t>
             </a:r>
             <a:endParaRPr lang="en-US" sz="950" dirty="0"/>
           </a:p>
@@ -6130,13 +5904,13 @@
       </p:sp>
       <p:sp>
         <p:nvSpPr>
-          <p:cNvPr id="27" name="Text 25"/>
-          <p:cNvSpPr/>
-          <p:nvPr/>
-        </p:nvSpPr>
-        <p:spPr>
-          <a:xfrm>
-            <a:off x="502920" y="3721608"/>
+          <p:cNvPr id="35" name="Text 33"/>
+          <p:cNvSpPr/>
+          <p:nvPr/>
+        </p:nvSpPr>
+        <p:spPr>
+          <a:xfrm>
+            <a:off x="2766913" y="3721608"/>
             <a:ext cx="3794760" cy="256032"/>
           </a:xfrm>
           <a:prstGeom prst="rect">
@@ -6149,7 +5923,7 @@
           <a:bodyPr wrap="square" rtlCol="0" anchor="ctr"/>
           <a:lstStyle/>
           <a:p>
-            <a:pPr indent="0" marL="0">
+            <a:pPr marL="0" indent="0">
               <a:buNone/>
             </a:pPr>
             <a:r>
@@ -6158,7 +5932,7 @@
                   <a:srgbClr val="2E4057"/>
                 </a:solidFill>
               </a:rPr>
-              <a:t>⏰ Khi port feature từ Samsung MyFiles hoặc cần hiểu pattern gốc.</a:t>
+              <a:t>⏰ Khi cần extract class, rename, chuyển pattern (Java-ish → idiomatic).</a:t>
             </a:r>
             <a:endParaRPr lang="en-US" sz="1050" dirty="0"/>
           </a:p>
@@ -6166,13 +5940,13 @@
       </p:sp>
       <p:sp>
         <p:nvSpPr>
-          <p:cNvPr id="28" name="Text 26"/>
-          <p:cNvSpPr/>
-          <p:nvPr/>
-        </p:nvSpPr>
-        <p:spPr>
-          <a:xfrm>
-            <a:off x="502920" y="4005072"/>
+          <p:cNvPr id="36" name="Text 34"/>
+          <p:cNvSpPr/>
+          <p:nvPr/>
+        </p:nvSpPr>
+        <p:spPr>
+          <a:xfrm>
+            <a:off x="2766913" y="4005072"/>
             <a:ext cx="3794760" cy="237744"/>
           </a:xfrm>
           <a:prstGeom prst="rect">
@@ -6185,7 +5959,7 @@
           <a:bodyPr wrap="square" rtlCol="0" anchor="ctr"/>
           <a:lstStyle/>
           <a:p>
-            <a:pPr indent="0" marL="0">
+            <a:pPr marL="0" indent="0">
               <a:buNone/>
             </a:pPr>
             <a:r>
@@ -6194,7 +5968,7 @@
                   <a:srgbClr val="0D1B4B"/>
                 </a:solidFill>
               </a:rPr>
-              <a:t>• Search Grep trong MyFiles codebase</a:t>
+              <a:t>• 6 loại refactor: UiState, stateless composable, Repository, Flow, nullable callback, Base ViewModel</a:t>
             </a:r>
             <a:endParaRPr lang="en-US" sz="950" dirty="0"/>
           </a:p>
@@ -6202,13 +5976,13 @@
       </p:sp>
       <p:sp>
         <p:nvSpPr>
-          <p:cNvPr id="29" name="Text 27"/>
-          <p:cNvSpPr/>
-          <p:nvPr/>
-        </p:nvSpPr>
-        <p:spPr>
-          <a:xfrm>
-            <a:off x="502920" y="4261104"/>
+          <p:cNvPr id="37" name="Text 35"/>
+          <p:cNvSpPr/>
+          <p:nvPr/>
+        </p:nvSpPr>
+        <p:spPr>
+          <a:xfrm>
+            <a:off x="2766913" y="4261104"/>
             <a:ext cx="3794760" cy="237744"/>
           </a:xfrm>
           <a:prstGeom prst="rect">
@@ -6221,7 +5995,7 @@
           <a:bodyPr wrap="square" rtlCol="0" anchor="ctr"/>
           <a:lstStyle/>
           <a:p>
-            <a:pPr indent="0" marL="0">
+            <a:pPr marL="0" indent="0">
               <a:buNone/>
             </a:pPr>
             <a:r>
@@ -6230,7 +6004,7 @@
                   <a:srgbClr val="0D1B4B"/>
                 </a:solidFill>
               </a:rPr>
-              <a:t>• Identify pattern: Samsung-only? View/XML? Callback? Java-ish?</a:t>
+              <a:t>• Quy trình: Read → Analyze → Plan → Propose diff → Apply → Verify</a:t>
             </a:r>
             <a:endParaRPr lang="en-US" sz="950" dirty="0"/>
           </a:p>
@@ -6238,13 +6012,13 @@
       </p:sp>
       <p:sp>
         <p:nvSpPr>
-          <p:cNvPr id="30" name="Text 28"/>
-          <p:cNvSpPr/>
-          <p:nvPr/>
-        </p:nvSpPr>
-        <p:spPr>
-          <a:xfrm>
-            <a:off x="502920" y="4517136"/>
+          <p:cNvPr id="38" name="Text 36"/>
+          <p:cNvSpPr/>
+          <p:nvPr/>
+        </p:nvSpPr>
+        <p:spPr>
+          <a:xfrm>
+            <a:off x="2766913" y="4517136"/>
             <a:ext cx="3794760" cy="237744"/>
           </a:xfrm>
           <a:prstGeom prst="rect">
@@ -6257,280 +6031,7 @@
           <a:bodyPr wrap="square" rtlCol="0" anchor="ctr"/>
           <a:lstStyle/>
           <a:p>
-            <a:pPr indent="0" marL="0">
-              <a:buNone/>
-            </a:pPr>
-            <a:r>
-              <a:rPr lang="en-US" sz="950" dirty="0">
-                <a:solidFill>
-                  <a:srgbClr val="0D1B4B"/>
-                </a:solidFill>
-              </a:rPr>
-              <a:t>• Output: File gốc + Logic cốt lõi + Port sang CodeVui skeleton</a:t>
-            </a:r>
-            <a:endParaRPr lang="en-US" sz="950" dirty="0"/>
-          </a:p>
-        </p:txBody>
-      </p:sp>
-      <p:sp>
-        <p:nvSpPr>
-          <p:cNvPr id="31" name="Shape 29"/>
-          <p:cNvSpPr/>
-          <p:nvPr/>
-        </p:nvSpPr>
-        <p:spPr>
-          <a:xfrm>
-            <a:off x="4663440" y="3154680"/>
-            <a:ext cx="4160520" cy="1709928"/>
-          </a:xfrm>
-          <a:prstGeom prst="rect">
-            <a:avLst/>
-          </a:prstGeom>
-          <a:solidFill>
-            <a:srgbClr val="FFFFFF"/>
-          </a:solidFill>
-          <a:ln w="12700">
-            <a:solidFill>
-              <a:srgbClr val="D8E9EF"/>
-            </a:solidFill>
-            <a:prstDash val="solid"/>
-          </a:ln>
-          <a:effectLst>
-            <a:outerShdw sx="100000" sy="100000" kx="0" ky="0" algn="bl" rotWithShape="0" blurRad="101600" dist="38100" dir="8100000">
-              <a:srgbClr val="000000">
-                <a:alpha val="12000"/>
-              </a:srgbClr>
-            </a:outerShdw>
-          </a:effectLst>
-        </p:spPr>
-      </p:sp>
-      <p:sp>
-        <p:nvSpPr>
-          <p:cNvPr id="32" name="Shape 30"/>
-          <p:cNvSpPr/>
-          <p:nvPr/>
-        </p:nvSpPr>
-        <p:spPr>
-          <a:xfrm>
-            <a:off x="4663440" y="3154680"/>
-            <a:ext cx="64008" cy="1709928"/>
-          </a:xfrm>
-          <a:prstGeom prst="rect">
-            <a:avLst/>
-          </a:prstGeom>
-          <a:solidFill>
-            <a:srgbClr val="F4A261"/>
-          </a:solidFill>
-          <a:ln w="12700">
-            <a:solidFill>
-              <a:srgbClr val="F4A261"/>
-            </a:solidFill>
-            <a:prstDash val="solid"/>
-          </a:ln>
-        </p:spPr>
-      </p:sp>
-      <p:sp>
-        <p:nvSpPr>
-          <p:cNvPr id="33" name="Text 31"/>
-          <p:cNvSpPr/>
-          <p:nvPr/>
-        </p:nvSpPr>
-        <p:spPr>
-          <a:xfrm>
-            <a:off x="4846320" y="3172968"/>
-            <a:ext cx="3291840" cy="320040"/>
-          </a:xfrm>
-          <a:prstGeom prst="rect">
-            <a:avLst/>
-          </a:prstGeom>
-          <a:noFill/>
-          <a:ln/>
-        </p:spPr>
-        <p:txBody>
-          <a:bodyPr wrap="square" rtlCol="0" anchor="ctr"/>
-          <a:lstStyle/>
-          <a:p>
-            <a:pPr indent="0" marL="0">
-              <a:buNone/>
-            </a:pPr>
-            <a:r>
-              <a:rPr lang="en-US" sz="1300" b="1" dirty="0">
-                <a:solidFill>
-                  <a:srgbClr val="F4A261"/>
-                </a:solidFill>
-              </a:rPr>
-              <a:t>♻️  refactor-assistant.md</a:t>
-            </a:r>
-            <a:endParaRPr lang="en-US" sz="1300" dirty="0"/>
-          </a:p>
-        </p:txBody>
-      </p:sp>
-      <p:sp>
-        <p:nvSpPr>
-          <p:cNvPr id="34" name="Text 32"/>
-          <p:cNvSpPr/>
-          <p:nvPr/>
-        </p:nvSpPr>
-        <p:spPr>
-          <a:xfrm>
-            <a:off x="4846320" y="3483864"/>
-            <a:ext cx="3794760" cy="228600"/>
-          </a:xfrm>
-          <a:prstGeom prst="rect">
-            <a:avLst/>
-          </a:prstGeom>
-          <a:noFill/>
-          <a:ln/>
-        </p:spPr>
-        <p:txBody>
-          <a:bodyPr wrap="square" rtlCol="0" anchor="ctr"/>
-          <a:lstStyle/>
-          <a:p>
-            <a:pPr indent="0" marL="0">
-              <a:buNone/>
-            </a:pPr>
-            <a:r>
-              <a:rPr lang="en-US" sz="950" i="1" dirty="0">
-                <a:solidFill>
-                  <a:srgbClr val="6B7A8D"/>
-                </a:solidFill>
-              </a:rPr>
-              <a:t>Tools: Read · Edit · Grep · Glob · Bash</a:t>
-            </a:r>
-            <a:endParaRPr lang="en-US" sz="950" dirty="0"/>
-          </a:p>
-        </p:txBody>
-      </p:sp>
-      <p:sp>
-        <p:nvSpPr>
-          <p:cNvPr id="35" name="Text 33"/>
-          <p:cNvSpPr/>
-          <p:nvPr/>
-        </p:nvSpPr>
-        <p:spPr>
-          <a:xfrm>
-            <a:off x="4846320" y="3721608"/>
-            <a:ext cx="3794760" cy="256032"/>
-          </a:xfrm>
-          <a:prstGeom prst="rect">
-            <a:avLst/>
-          </a:prstGeom>
-          <a:noFill/>
-          <a:ln/>
-        </p:spPr>
-        <p:txBody>
-          <a:bodyPr wrap="square" rtlCol="0" anchor="ctr"/>
-          <a:lstStyle/>
-          <a:p>
-            <a:pPr indent="0" marL="0">
-              <a:buNone/>
-            </a:pPr>
-            <a:r>
-              <a:rPr lang="en-US" sz="1050" dirty="0">
-                <a:solidFill>
-                  <a:srgbClr val="2E4057"/>
-                </a:solidFill>
-              </a:rPr>
-              <a:t>⏰ Khi cần extract class, rename, chuyển pattern (Java-ish → idiomatic).</a:t>
-            </a:r>
-            <a:endParaRPr lang="en-US" sz="1050" dirty="0"/>
-          </a:p>
-        </p:txBody>
-      </p:sp>
-      <p:sp>
-        <p:nvSpPr>
-          <p:cNvPr id="36" name="Text 34"/>
-          <p:cNvSpPr/>
-          <p:nvPr/>
-        </p:nvSpPr>
-        <p:spPr>
-          <a:xfrm>
-            <a:off x="4846320" y="4005072"/>
-            <a:ext cx="3794760" cy="237744"/>
-          </a:xfrm>
-          <a:prstGeom prst="rect">
-            <a:avLst/>
-          </a:prstGeom>
-          <a:noFill/>
-          <a:ln/>
-        </p:spPr>
-        <p:txBody>
-          <a:bodyPr wrap="square" rtlCol="0" anchor="ctr"/>
-          <a:lstStyle/>
-          <a:p>
-            <a:pPr indent="0" marL="0">
-              <a:buNone/>
-            </a:pPr>
-            <a:r>
-              <a:rPr lang="en-US" sz="950" dirty="0">
-                <a:solidFill>
-                  <a:srgbClr val="0D1B4B"/>
-                </a:solidFill>
-              </a:rPr>
-              <a:t>• 6 loại refactor: UiState, stateless composable, Repository, Flow, nullable callback, Base ViewModel</a:t>
-            </a:r>
-            <a:endParaRPr lang="en-US" sz="950" dirty="0"/>
-          </a:p>
-        </p:txBody>
-      </p:sp>
-      <p:sp>
-        <p:nvSpPr>
-          <p:cNvPr id="37" name="Text 35"/>
-          <p:cNvSpPr/>
-          <p:nvPr/>
-        </p:nvSpPr>
-        <p:spPr>
-          <a:xfrm>
-            <a:off x="4846320" y="4261104"/>
-            <a:ext cx="3794760" cy="237744"/>
-          </a:xfrm>
-          <a:prstGeom prst="rect">
-            <a:avLst/>
-          </a:prstGeom>
-          <a:noFill/>
-          <a:ln/>
-        </p:spPr>
-        <p:txBody>
-          <a:bodyPr wrap="square" rtlCol="0" anchor="ctr"/>
-          <a:lstStyle/>
-          <a:p>
-            <a:pPr indent="0" marL="0">
-              <a:buNone/>
-            </a:pPr>
-            <a:r>
-              <a:rPr lang="en-US" sz="950" dirty="0">
-                <a:solidFill>
-                  <a:srgbClr val="0D1B4B"/>
-                </a:solidFill>
-              </a:rPr>
-              <a:t>• Quy trình: Read → Analyze → Plan → Propose diff → Apply → Verify</a:t>
-            </a:r>
-            <a:endParaRPr lang="en-US" sz="950" dirty="0"/>
-          </a:p>
-        </p:txBody>
-      </p:sp>
-      <p:sp>
-        <p:nvSpPr>
-          <p:cNvPr id="38" name="Text 36"/>
-          <p:cNvSpPr/>
-          <p:nvPr/>
-        </p:nvSpPr>
-        <p:spPr>
-          <a:xfrm>
-            <a:off x="4846320" y="4517136"/>
-            <a:ext cx="3794760" cy="237744"/>
-          </a:xfrm>
-          <a:prstGeom prst="rect">
-            <a:avLst/>
-          </a:prstGeom>
-          <a:noFill/>
-          <a:ln/>
-        </p:spPr>
-        <p:txBody>
-          <a:bodyPr wrap="square" rtlCol="0" anchor="ctr"/>
-          <a:lstStyle/>
-          <a:p>
-            <a:pPr indent="0" marL="0">
+            <a:pPr marL="0" indent="0">
               <a:buNone/>
             </a:pPr>
             <a:r>
@@ -6566,7 +6067,7 @@
           <a:bodyPr wrap="square" rtlCol="0" anchor="ctr"/>
           <a:lstStyle/>
           <a:p>
-            <a:pPr algn="r" indent="0" marL="0">
+            <a:pPr marL="0" indent="0" algn="r">
               <a:buNone/>
             </a:pPr>
             <a:r>
@@ -6597,6 +6098,7 @@
         <a:solidFill>
           <a:srgbClr val="F4F8FA"/>
         </a:solidFill>
+        <a:effectLst/>
       </p:bgPr>
     </p:bg>
     <p:spTree>
@@ -6686,7 +6188,7 @@
           <a:bodyPr wrap="square" lIns="0" tIns="0" rIns="0" bIns="0" rtlCol="0" anchor="ctr"/>
           <a:lstStyle/>
           <a:p>
-            <a:pPr algn="ctr" indent="0" marL="0">
+            <a:pPr marL="0" indent="0" algn="ctr">
               <a:buNone/>
             </a:pPr>
             <a:r>
@@ -6722,7 +6224,7 @@
           <a:bodyPr wrap="square" rtlCol="0" anchor="ctr"/>
           <a:lstStyle/>
           <a:p>
-            <a:pPr indent="0" marL="0">
+            <a:pPr marL="0" indent="0">
               <a:buNone/>
             </a:pPr>
             <a:r>
@@ -6764,7 +6266,7 @@
             <a:prstDash val="solid"/>
           </a:ln>
           <a:effectLst>
-            <a:outerShdw sx="100000" sy="100000" kx="0" ky="0" algn="bl" rotWithShape="0" blurRad="101600" dist="38100" dir="8100000">
+            <a:outerShdw blurRad="101600" dist="38100" dir="8100000" algn="bl" rotWithShape="0">
               <a:srgbClr val="000000">
                 <a:alpha val="12000"/>
               </a:srgbClr>
@@ -6818,7 +6320,7 @@
           <a:bodyPr wrap="square" rtlCol="0" anchor="ctr"/>
           <a:lstStyle/>
           <a:p>
-            <a:pPr indent="0" marL="0">
+            <a:pPr marL="0" indent="0">
               <a:buNone/>
             </a:pPr>
             <a:r>
@@ -6854,7 +6356,7 @@
           <a:bodyPr wrap="square" rtlCol="0" anchor="ctr"/>
           <a:lstStyle/>
           <a:p>
-            <a:pPr indent="0" marL="0">
+            <a:pPr marL="0" indent="0">
               <a:buNone/>
             </a:pPr>
             <a:r>
@@ -6890,7 +6392,7 @@
           <a:bodyPr wrap="square" rtlCol="0" anchor="ctr"/>
           <a:lstStyle/>
           <a:p>
-            <a:pPr indent="0" marL="0">
+            <a:pPr marL="0" indent="0">
               <a:buNone/>
             </a:pPr>
             <a:r>
@@ -6929,7 +6431,7 @@
           <a:bodyPr wrap="square" rtlCol="0" anchor="ctr"/>
           <a:lstStyle/>
           <a:p>
-            <a:pPr indent="0" marL="0">
+            <a:pPr marL="0" indent="0">
               <a:buNone/>
             </a:pPr>
             <a:r>
@@ -6968,7 +6470,7 @@
             <a:prstDash val="solid"/>
           </a:ln>
           <a:effectLst>
-            <a:outerShdw sx="100000" sy="100000" kx="0" ky="0" algn="bl" rotWithShape="0" blurRad="101600" dist="38100" dir="8100000">
+            <a:outerShdw blurRad="101600" dist="38100" dir="8100000" algn="bl" rotWithShape="0">
               <a:srgbClr val="000000">
                 <a:alpha val="12000"/>
               </a:srgbClr>
@@ -7022,7 +6524,7 @@
           <a:bodyPr wrap="square" rtlCol="0" anchor="ctr"/>
           <a:lstStyle/>
           <a:p>
-            <a:pPr indent="0" marL="0">
+            <a:pPr marL="0" indent="0">
               <a:buNone/>
             </a:pPr>
             <a:r>
@@ -7083,7 +6585,7 @@
           <a:bodyPr wrap="square" lIns="0" tIns="0" rIns="0" bIns="0" rtlCol="0" anchor="ctr"/>
           <a:lstStyle/>
           <a:p>
-            <a:pPr algn="ctr" indent="0" marL="0">
+            <a:pPr marL="0" indent="0" algn="ctr">
               <a:buNone/>
             </a:pPr>
             <a:r>
@@ -7148,7 +6650,7 @@
           <a:bodyPr wrap="square" rtlCol="0" anchor="ctr"/>
           <a:lstStyle/>
           <a:p>
-            <a:pPr indent="0" marL="0">
+            <a:pPr marL="0" indent="0">
               <a:buNone/>
             </a:pPr>
             <a:r>
@@ -7213,7 +6715,7 @@
           <a:bodyPr wrap="square" rtlCol="0" anchor="ctr"/>
           <a:lstStyle/>
           <a:p>
-            <a:pPr indent="0" marL="0">
+            <a:pPr marL="0" indent="0">
               <a:buNone/>
             </a:pPr>
             <a:r>
@@ -7278,7 +6780,7 @@
           <a:bodyPr wrap="square" rtlCol="0" anchor="ctr"/>
           <a:lstStyle/>
           <a:p>
-            <a:pPr indent="0" marL="0">
+            <a:pPr marL="0" indent="0">
               <a:buNone/>
             </a:pPr>
             <a:r>
@@ -7314,7 +6816,7 @@
           <a:bodyPr wrap="square" rtlCol="0" anchor="ctr"/>
           <a:lstStyle/>
           <a:p>
-            <a:pPr algn="ctr" indent="0" marL="0">
+            <a:pPr marL="0" indent="0" algn="ctr">
               <a:buNone/>
             </a:pPr>
             <a:r>
@@ -7375,7 +6877,7 @@
           <a:bodyPr wrap="square" lIns="0" tIns="0" rIns="0" bIns="0" rtlCol="0" anchor="ctr"/>
           <a:lstStyle/>
           <a:p>
-            <a:pPr algn="ctr" indent="0" marL="0">
+            <a:pPr marL="0" indent="0" algn="ctr">
               <a:buNone/>
             </a:pPr>
             <a:r>
@@ -7440,7 +6942,7 @@
           <a:bodyPr wrap="square" rtlCol="0" anchor="ctr"/>
           <a:lstStyle/>
           <a:p>
-            <a:pPr indent="0" marL="0">
+            <a:pPr marL="0" indent="0">
               <a:buNone/>
             </a:pPr>
             <a:r>
@@ -7505,7 +7007,7 @@
           <a:bodyPr wrap="square" rtlCol="0" anchor="ctr"/>
           <a:lstStyle/>
           <a:p>
-            <a:pPr indent="0" marL="0">
+            <a:pPr marL="0" indent="0">
               <a:buNone/>
             </a:pPr>
             <a:r>
@@ -7541,7 +7043,7 @@
           <a:bodyPr wrap="square" rtlCol="0" anchor="ctr"/>
           <a:lstStyle/>
           <a:p>
-            <a:pPr algn="ctr" indent="0" marL="0">
+            <a:pPr marL="0" indent="0" algn="ctr">
               <a:buNone/>
             </a:pPr>
             <a:r>
@@ -7602,7 +7104,7 @@
           <a:bodyPr wrap="square" lIns="0" tIns="0" rIns="0" bIns="0" rtlCol="0" anchor="ctr"/>
           <a:lstStyle/>
           <a:p>
-            <a:pPr algn="ctr" indent="0" marL="0">
+            <a:pPr marL="0" indent="0" algn="ctr">
               <a:buNone/>
             </a:pPr>
             <a:r>
@@ -7667,7 +7169,7 @@
           <a:bodyPr wrap="square" rtlCol="0" anchor="ctr"/>
           <a:lstStyle/>
           <a:p>
-            <a:pPr indent="0" marL="0">
+            <a:pPr marL="0" indent="0">
               <a:buNone/>
             </a:pPr>
             <a:r>
@@ -7732,7 +7234,7 @@
           <a:bodyPr wrap="square" rtlCol="0" anchor="ctr"/>
           <a:lstStyle/>
           <a:p>
-            <a:pPr indent="0" marL="0">
+            <a:pPr marL="0" indent="0">
               <a:buNone/>
             </a:pPr>
             <a:r>
@@ -7797,7 +7299,7 @@
           <a:bodyPr wrap="square" rtlCol="0" anchor="ctr"/>
           <a:lstStyle/>
           <a:p>
-            <a:pPr indent="0" marL="0">
+            <a:pPr marL="0" indent="0">
               <a:buNone/>
             </a:pPr>
             <a:r>
@@ -7833,7 +7335,7 @@
           <a:bodyPr wrap="square" rtlCol="0" anchor="ctr"/>
           <a:lstStyle/>
           <a:p>
-            <a:pPr algn="ctr" indent="0" marL="0">
+            <a:pPr marL="0" indent="0" algn="ctr">
               <a:buNone/>
             </a:pPr>
             <a:r>
@@ -7894,7 +7396,7 @@
           <a:bodyPr wrap="square" lIns="0" tIns="0" rIns="0" bIns="0" rtlCol="0" anchor="ctr"/>
           <a:lstStyle/>
           <a:p>
-            <a:pPr algn="ctr" indent="0" marL="0">
+            <a:pPr marL="0" indent="0" algn="ctr">
               <a:buNone/>
             </a:pPr>
             <a:r>
@@ -7959,7 +7461,7 @@
           <a:bodyPr wrap="square" rtlCol="0" anchor="ctr"/>
           <a:lstStyle/>
           <a:p>
-            <a:pPr indent="0" marL="0">
+            <a:pPr marL="0" indent="0">
               <a:buNone/>
             </a:pPr>
             <a:r>
@@ -8024,7 +7526,7 @@
           <a:bodyPr wrap="square" rtlCol="0" anchor="ctr"/>
           <a:lstStyle/>
           <a:p>
-            <a:pPr indent="0" marL="0">
+            <a:pPr marL="0" indent="0">
               <a:buNone/>
             </a:pPr>
             <a:r>
@@ -8060,7 +7562,7 @@
           <a:bodyPr wrap="square" rtlCol="0" anchor="ctr"/>
           <a:lstStyle/>
           <a:p>
-            <a:pPr algn="ctr" indent="0" marL="0">
+            <a:pPr marL="0" indent="0" algn="ctr">
               <a:buNone/>
             </a:pPr>
             <a:r>
@@ -8121,7 +7623,7 @@
           <a:bodyPr wrap="square" lIns="0" tIns="0" rIns="0" bIns="0" rtlCol="0" anchor="ctr"/>
           <a:lstStyle/>
           <a:p>
-            <a:pPr algn="ctr" indent="0" marL="0">
+            <a:pPr marL="0" indent="0" algn="ctr">
               <a:buNone/>
             </a:pPr>
             <a:r>
@@ -8186,7 +7688,7 @@
           <a:bodyPr wrap="square" rtlCol="0" anchor="ctr"/>
           <a:lstStyle/>
           <a:p>
-            <a:pPr indent="0" marL="0">
+            <a:pPr marL="0" indent="0">
               <a:buNone/>
             </a:pPr>
             <a:r>
@@ -8222,7 +7724,7 @@
           <a:bodyPr wrap="square" rtlCol="0" anchor="ctr"/>
           <a:lstStyle/>
           <a:p>
-            <a:pPr algn="ctr" indent="0" marL="0">
+            <a:pPr marL="0" indent="0" algn="ctr">
               <a:buNone/>
             </a:pPr>
             <a:r>
@@ -8283,7 +7785,7 @@
           <a:bodyPr wrap="square" lIns="0" tIns="0" rIns="0" bIns="0" rtlCol="0" anchor="ctr"/>
           <a:lstStyle/>
           <a:p>
-            <a:pPr algn="ctr" indent="0" marL="0">
+            <a:pPr marL="0" indent="0" algn="ctr">
               <a:buNone/>
             </a:pPr>
             <a:r>
@@ -8348,7 +7850,7 @@
           <a:bodyPr wrap="square" rtlCol="0" anchor="ctr"/>
           <a:lstStyle/>
           <a:p>
-            <a:pPr indent="0" marL="0">
+            <a:pPr marL="0" indent="0">
               <a:buNone/>
             </a:pPr>
             <a:r>
@@ -8413,7 +7915,7 @@
           <a:bodyPr wrap="square" rtlCol="0" anchor="ctr"/>
           <a:lstStyle/>
           <a:p>
-            <a:pPr indent="0" marL="0">
+            <a:pPr marL="0" indent="0">
               <a:buNone/>
             </a:pPr>
             <a:r>
@@ -8449,7 +7951,7 @@
           <a:bodyPr wrap="square" rtlCol="0" anchor="ctr"/>
           <a:lstStyle/>
           <a:p>
-            <a:pPr algn="ctr" indent="0" marL="0">
+            <a:pPr marL="0" indent="0" algn="ctr">
               <a:buNone/>
             </a:pPr>
             <a:r>
@@ -8510,7 +8012,7 @@
           <a:bodyPr wrap="square" lIns="0" tIns="0" rIns="0" bIns="0" rtlCol="0" anchor="ctr"/>
           <a:lstStyle/>
           <a:p>
-            <a:pPr algn="ctr" indent="0" marL="0">
+            <a:pPr marL="0" indent="0" algn="ctr">
               <a:buNone/>
             </a:pPr>
             <a:r>
@@ -8575,7 +8077,7 @@
           <a:bodyPr wrap="square" rtlCol="0" anchor="ctr"/>
           <a:lstStyle/>
           <a:p>
-            <a:pPr indent="0" marL="0">
+            <a:pPr marL="0" indent="0">
               <a:buNone/>
             </a:pPr>
             <a:r>
@@ -8640,7 +8142,7 @@
           <a:bodyPr wrap="square" rtlCol="0" anchor="ctr"/>
           <a:lstStyle/>
           <a:p>
-            <a:pPr indent="0" marL="0">
+            <a:pPr marL="0" indent="0">
               <a:buNone/>
             </a:pPr>
             <a:r>
@@ -8676,7 +8178,7 @@
           <a:bodyPr wrap="square" rtlCol="0" anchor="ctr"/>
           <a:lstStyle/>
           <a:p>
-            <a:pPr algn="r" indent="0" marL="0">
+            <a:pPr marL="0" indent="0" algn="r">
               <a:buNone/>
             </a:pPr>
             <a:r>
@@ -8707,6 +8209,7 @@
         <a:solidFill>
           <a:srgbClr val="F4F8FA"/>
         </a:solidFill>
+        <a:effectLst/>
       </p:bgPr>
     </p:bg>
     <p:spTree>
@@ -8769,7 +8272,7 @@
           <a:bodyPr wrap="square" rtlCol="0" anchor="ctr"/>
           <a:lstStyle/>
           <a:p>
-            <a:pPr indent="0" marL="0">
+            <a:pPr marL="0" indent="0">
               <a:buNone/>
             </a:pPr>
             <a:r>
@@ -8862,7 +8365,7 @@
           <a:bodyPr wrap="square" rtlCol="0" anchor="ctr"/>
           <a:lstStyle/>
           <a:p>
-            <a:pPr indent="0" marL="0">
+            <a:pPr marL="0" indent="0">
               <a:buNone/>
             </a:pPr>
             <a:r>
@@ -8898,7 +8401,7 @@
           <a:bodyPr wrap="square" rtlCol="0" anchor="ctr"/>
           <a:lstStyle/>
           <a:p>
-            <a:pPr indent="0" marL="0">
+            <a:pPr marL="0" indent="0">
               <a:buNone/>
             </a:pPr>
             <a:r>
@@ -8988,7 +8491,7 @@
           <a:bodyPr wrap="square" rtlCol="0" anchor="ctr"/>
           <a:lstStyle/>
           <a:p>
-            <a:pPr indent="0" marL="0">
+            <a:pPr marL="0" indent="0">
               <a:buNone/>
             </a:pPr>
             <a:r>
@@ -9024,7 +8527,7 @@
           <a:bodyPr wrap="square" rtlCol="0" anchor="ctr"/>
           <a:lstStyle/>
           <a:p>
-            <a:pPr indent="0" marL="0">
+            <a:pPr marL="0" indent="0">
               <a:buNone/>
             </a:pPr>
             <a:r>
@@ -9114,7 +8617,7 @@
           <a:bodyPr wrap="square" rtlCol="0" anchor="ctr"/>
           <a:lstStyle/>
           <a:p>
-            <a:pPr indent="0" marL="0">
+            <a:pPr marL="0" indent="0">
               <a:buNone/>
             </a:pPr>
             <a:r>
@@ -9150,7 +8653,7 @@
           <a:bodyPr wrap="square" rtlCol="0" anchor="ctr"/>
           <a:lstStyle/>
           <a:p>
-            <a:pPr indent="0" marL="0">
+            <a:pPr marL="0" indent="0">
               <a:buNone/>
             </a:pPr>
             <a:r>
@@ -9240,7 +8743,7 @@
           <a:bodyPr wrap="square" rtlCol="0" anchor="ctr"/>
           <a:lstStyle/>
           <a:p>
-            <a:pPr indent="0" marL="0">
+            <a:pPr marL="0" indent="0">
               <a:buNone/>
             </a:pPr>
             <a:r>
@@ -9276,7 +8779,7 @@
           <a:bodyPr wrap="square" rtlCol="0" anchor="ctr"/>
           <a:lstStyle/>
           <a:p>
-            <a:pPr indent="0" marL="0">
+            <a:pPr marL="0" indent="0">
               <a:buNone/>
             </a:pPr>
             <a:r>
@@ -9366,7 +8869,7 @@
           <a:bodyPr wrap="square" rtlCol="0" anchor="ctr"/>
           <a:lstStyle/>
           <a:p>
-            <a:pPr indent="0" marL="0">
+            <a:pPr marL="0" indent="0">
               <a:buNone/>
             </a:pPr>
             <a:r>
@@ -9402,7 +8905,7 @@
           <a:bodyPr wrap="square" rtlCol="0" anchor="ctr"/>
           <a:lstStyle/>
           <a:p>
-            <a:pPr indent="0" marL="0">
+            <a:pPr marL="0" indent="0">
               <a:buNone/>
             </a:pPr>
             <a:r>
@@ -9492,7 +8995,7 @@
           <a:bodyPr wrap="square" rtlCol="0" anchor="ctr"/>
           <a:lstStyle/>
           <a:p>
-            <a:pPr indent="0" marL="0">
+            <a:pPr marL="0" indent="0">
               <a:buNone/>
             </a:pPr>
             <a:r>
@@ -9528,7 +9031,7 @@
           <a:bodyPr wrap="square" rtlCol="0" anchor="ctr"/>
           <a:lstStyle/>
           <a:p>
-            <a:pPr indent="0" marL="0">
+            <a:pPr marL="0" indent="0">
               <a:buNone/>
             </a:pPr>
             <a:r>
@@ -9618,7 +9121,7 @@
           <a:bodyPr wrap="square" rtlCol="0" anchor="ctr"/>
           <a:lstStyle/>
           <a:p>
-            <a:pPr indent="0" marL="0">
+            <a:pPr marL="0" indent="0">
               <a:buNone/>
             </a:pPr>
             <a:r>
@@ -9654,7 +9157,7 @@
           <a:bodyPr wrap="square" rtlCol="0" anchor="ctr"/>
           <a:lstStyle/>
           <a:p>
-            <a:pPr indent="0" marL="0">
+            <a:pPr marL="0" indent="0">
               <a:buNone/>
             </a:pPr>
             <a:r>
@@ -9744,7 +9247,7 @@
           <a:bodyPr wrap="square" rtlCol="0" anchor="ctr"/>
           <a:lstStyle/>
           <a:p>
-            <a:pPr indent="0" marL="0">
+            <a:pPr marL="0" indent="0">
               <a:buNone/>
             </a:pPr>
             <a:r>
@@ -9780,7 +9283,7 @@
           <a:bodyPr wrap="square" rtlCol="0" anchor="ctr"/>
           <a:lstStyle/>
           <a:p>
-            <a:pPr indent="0" marL="0">
+            <a:pPr marL="0" indent="0">
               <a:buNone/>
             </a:pPr>
             <a:r>
@@ -9870,7 +9373,7 @@
           <a:bodyPr wrap="square" rtlCol="0" anchor="ctr"/>
           <a:lstStyle/>
           <a:p>
-            <a:pPr indent="0" marL="0">
+            <a:pPr marL="0" indent="0">
               <a:buNone/>
             </a:pPr>
             <a:r>
@@ -9906,7 +9409,7 @@
           <a:bodyPr wrap="square" rtlCol="0" anchor="ctr"/>
           <a:lstStyle/>
           <a:p>
-            <a:pPr indent="0" marL="0">
+            <a:pPr marL="0" indent="0">
               <a:buNone/>
             </a:pPr>
             <a:r>
@@ -9996,7 +9499,7 @@
           <a:bodyPr wrap="square" rtlCol="0" anchor="ctr"/>
           <a:lstStyle/>
           <a:p>
-            <a:pPr indent="0" marL="0">
+            <a:pPr marL="0" indent="0">
               <a:buNone/>
             </a:pPr>
             <a:r>
@@ -10032,7 +9535,7 @@
           <a:bodyPr wrap="square" rtlCol="0" anchor="ctr"/>
           <a:lstStyle/>
           <a:p>
-            <a:pPr indent="0" marL="0">
+            <a:pPr marL="0" indent="0">
               <a:buNone/>
             </a:pPr>
             <a:r>
@@ -10122,7 +9625,7 @@
           <a:bodyPr wrap="square" rtlCol="0" anchor="ctr"/>
           <a:lstStyle/>
           <a:p>
-            <a:pPr indent="0" marL="0">
+            <a:pPr marL="0" indent="0">
               <a:buNone/>
             </a:pPr>
             <a:r>
@@ -10158,7 +9661,7 @@
           <a:bodyPr wrap="square" rtlCol="0" anchor="ctr"/>
           <a:lstStyle/>
           <a:p>
-            <a:pPr indent="0" marL="0">
+            <a:pPr marL="0" indent="0">
               <a:buNone/>
             </a:pPr>
             <a:r>
@@ -10248,7 +9751,7 @@
           <a:bodyPr wrap="square" rtlCol="0" anchor="ctr"/>
           <a:lstStyle/>
           <a:p>
-            <a:pPr indent="0" marL="0">
+            <a:pPr marL="0" indent="0">
               <a:buNone/>
             </a:pPr>
             <a:r>
@@ -10284,7 +9787,7 @@
           <a:bodyPr wrap="square" rtlCol="0" anchor="ctr"/>
           <a:lstStyle/>
           <a:p>
-            <a:pPr indent="0" marL="0">
+            <a:pPr marL="0" indent="0">
               <a:buNone/>
             </a:pPr>
             <a:r>
@@ -10374,7 +9877,7 @@
           <a:bodyPr wrap="square" rtlCol="0" anchor="ctr"/>
           <a:lstStyle/>
           <a:p>
-            <a:pPr indent="0" marL="0">
+            <a:pPr marL="0" indent="0">
               <a:buNone/>
             </a:pPr>
             <a:r>
@@ -10410,7 +9913,7 @@
           <a:bodyPr wrap="square" rtlCol="0" anchor="ctr"/>
           <a:lstStyle/>
           <a:p>
-            <a:pPr indent="0" marL="0">
+            <a:pPr marL="0" indent="0">
               <a:buNone/>
             </a:pPr>
             <a:r>
@@ -10446,7 +9949,7 @@
           <a:bodyPr wrap="square" rtlCol="0" anchor="ctr"/>
           <a:lstStyle/>
           <a:p>
-            <a:pPr algn="r" indent="0" marL="0">
+            <a:pPr marL="0" indent="0" algn="r">
               <a:buNone/>
             </a:pPr>
             <a:r>
@@ -10477,6 +9980,7 @@
         <a:solidFill>
           <a:srgbClr val="0D1B4B"/>
         </a:solidFill>
+        <a:effectLst/>
       </p:bgPr>
     </p:bg>
     <p:spTree>
@@ -10564,7 +10068,7 @@
           <a:bodyPr wrap="square" rtlCol="0" anchor="ctr"/>
           <a:lstStyle/>
           <a:p>
-            <a:pPr indent="0" marL="0">
+            <a:pPr marL="0" indent="0">
               <a:buNone/>
             </a:pPr>
             <a:r>
@@ -10657,7 +10161,7 @@
           <a:bodyPr wrap="square" rtlCol="0" anchor="ctr"/>
           <a:lstStyle/>
           <a:p>
-            <a:pPr indent="0" marL="0">
+            <a:pPr marL="0" indent="0">
               <a:buNone/>
             </a:pPr>
             <a:r>
@@ -10693,7 +10197,7 @@
           <a:bodyPr wrap="square" rtlCol="0" anchor="ctr"/>
           <a:lstStyle/>
           <a:p>
-            <a:pPr indent="0" marL="0">
+            <a:pPr marL="0" indent="0">
               <a:buNone/>
             </a:pPr>
             <a:r>
@@ -10783,7 +10287,7 @@
           <a:bodyPr wrap="square" rtlCol="0" anchor="ctr"/>
           <a:lstStyle/>
           <a:p>
-            <a:pPr indent="0" marL="0">
+            <a:pPr marL="0" indent="0">
               <a:buNone/>
             </a:pPr>
             <a:r>
@@ -10819,7 +10323,7 @@
           <a:bodyPr wrap="square" rtlCol="0" anchor="ctr"/>
           <a:lstStyle/>
           <a:p>
-            <a:pPr indent="0" marL="0">
+            <a:pPr marL="0" indent="0">
               <a:buNone/>
             </a:pPr>
             <a:r>
@@ -10909,7 +10413,7 @@
           <a:bodyPr wrap="square" rtlCol="0" anchor="ctr"/>
           <a:lstStyle/>
           <a:p>
-            <a:pPr indent="0" marL="0">
+            <a:pPr marL="0" indent="0">
               <a:buNone/>
             </a:pPr>
             <a:r>
@@ -10945,7 +10449,7 @@
           <a:bodyPr wrap="square" rtlCol="0" anchor="ctr"/>
           <a:lstStyle/>
           <a:p>
-            <a:pPr indent="0" marL="0">
+            <a:pPr marL="0" indent="0">
               <a:buNone/>
             </a:pPr>
             <a:r>
@@ -11035,7 +10539,7 @@
           <a:bodyPr wrap="square" rtlCol="0" anchor="ctr"/>
           <a:lstStyle/>
           <a:p>
-            <a:pPr indent="0" marL="0">
+            <a:pPr marL="0" indent="0">
               <a:buNone/>
             </a:pPr>
             <a:r>
@@ -11071,7 +10575,7 @@
           <a:bodyPr wrap="square" rtlCol="0" anchor="ctr"/>
           <a:lstStyle/>
           <a:p>
-            <a:pPr indent="0" marL="0">
+            <a:pPr marL="0" indent="0">
               <a:buNone/>
             </a:pPr>
             <a:r>
@@ -11161,7 +10665,7 @@
           <a:bodyPr wrap="square" rtlCol="0" anchor="ctr"/>
           <a:lstStyle/>
           <a:p>
-            <a:pPr indent="0" marL="0">
+            <a:pPr marL="0" indent="0">
               <a:buNone/>
             </a:pPr>
             <a:r>
@@ -11197,7 +10701,7 @@
           <a:bodyPr wrap="square" rtlCol="0" anchor="ctr"/>
           <a:lstStyle/>
           <a:p>
-            <a:pPr indent="0" marL="0">
+            <a:pPr marL="0" indent="0">
               <a:buNone/>
             </a:pPr>
             <a:r>
@@ -11233,7 +10737,7 @@
           <a:bodyPr wrap="square" rtlCol="0" anchor="ctr"/>
           <a:lstStyle/>
           <a:p>
-            <a:pPr algn="r" indent="0" marL="0">
+            <a:pPr marL="0" indent="0" algn="r">
               <a:buNone/>
             </a:pPr>
             <a:r>
@@ -11264,6 +10768,7 @@
         <a:solidFill>
           <a:srgbClr val="F4F8FA"/>
         </a:solidFill>
+        <a:effectLst/>
       </p:bgPr>
     </p:bg>
     <p:spTree>
@@ -11326,7 +10831,7 @@
           <a:bodyPr wrap="square" rtlCol="0" anchor="ctr"/>
           <a:lstStyle/>
           <a:p>
-            <a:pPr indent="0" marL="0">
+            <a:pPr marL="0" indent="0">
               <a:buNone/>
             </a:pPr>
             <a:r>
@@ -11365,7 +10870,7 @@
           <a:bodyPr wrap="square" rtlCol="0" anchor="ctr"/>
           <a:lstStyle/>
           <a:p>
-            <a:pPr indent="0" marL="0">
+            <a:pPr marL="0" indent="0">
               <a:buNone/>
             </a:pPr>
             <a:r>
@@ -11429,7 +10934,7 @@
           <a:bodyPr wrap="square" lIns="0" tIns="0" rIns="0" bIns="0" rtlCol="0" anchor="ctr"/>
           <a:lstStyle/>
           <a:p>
-            <a:pPr algn="ctr" indent="0" marL="0">
+            <a:pPr marL="0" indent="0" algn="ctr">
               <a:buNone/>
             </a:pPr>
             <a:r>
@@ -11468,7 +10973,7 @@
             <a:prstDash val="solid"/>
           </a:ln>
           <a:effectLst>
-            <a:outerShdw sx="100000" sy="100000" kx="0" ky="0" algn="bl" rotWithShape="0" blurRad="101600" dist="38100" dir="8100000">
+            <a:outerShdw blurRad="101600" dist="38100" dir="8100000" algn="bl" rotWithShape="0">
               <a:srgbClr val="000000">
                 <a:alpha val="12000"/>
               </a:srgbClr>
@@ -11526,7 +11031,7 @@
           <a:bodyPr wrap="square" rtlCol="0" anchor="ctr"/>
           <a:lstStyle/>
           <a:p>
-            <a:pPr indent="0" marL="0">
+            <a:pPr marL="0" indent="0">
               <a:buNone/>
             </a:pPr>
             <a:r>
@@ -11591,7 +11096,7 @@
           <a:bodyPr wrap="square" rtlCol="0" anchor="ctr"/>
           <a:lstStyle/>
           <a:p>
-            <a:pPr indent="0" marL="0">
+            <a:pPr marL="0" indent="0">
               <a:buNone/>
             </a:pPr>
             <a:r>
@@ -11656,7 +11161,7 @@
           <a:bodyPr wrap="square" rtlCol="0" anchor="ctr"/>
           <a:lstStyle/>
           <a:p>
-            <a:pPr indent="0" marL="0">
+            <a:pPr marL="0" indent="0">
               <a:buNone/>
             </a:pPr>
             <a:r>
@@ -11721,7 +11226,7 @@
           <a:bodyPr wrap="square" rtlCol="0" anchor="ctr"/>
           <a:lstStyle/>
           <a:p>
-            <a:pPr indent="0" marL="0">
+            <a:pPr marL="0" indent="0">
               <a:buNone/>
             </a:pPr>
             <a:r>
@@ -11786,7 +11291,7 @@
           <a:bodyPr wrap="square" rtlCol="0" anchor="ctr"/>
           <a:lstStyle/>
           <a:p>
-            <a:pPr indent="0" marL="0">
+            <a:pPr marL="0" indent="0">
               <a:buNone/>
             </a:pPr>
             <a:r>
@@ -11847,7 +11352,7 @@
           <a:bodyPr wrap="square" lIns="0" tIns="0" rIns="0" bIns="0" rtlCol="0" anchor="ctr"/>
           <a:lstStyle/>
           <a:p>
-            <a:pPr algn="ctr" indent="0" marL="0">
+            <a:pPr marL="0" indent="0" algn="ctr">
               <a:buNone/>
             </a:pPr>
             <a:r>
@@ -11886,7 +11391,7 @@
             <a:prstDash val="solid"/>
           </a:ln>
           <a:effectLst>
-            <a:outerShdw sx="100000" sy="100000" kx="0" ky="0" algn="bl" rotWithShape="0" blurRad="101600" dist="38100" dir="8100000">
+            <a:outerShdw blurRad="101600" dist="38100" dir="8100000" algn="bl" rotWithShape="0">
               <a:srgbClr val="000000">
                 <a:alpha val="12000"/>
               </a:srgbClr>
@@ -11944,7 +11449,7 @@
           <a:bodyPr wrap="square" rtlCol="0" anchor="ctr"/>
           <a:lstStyle/>
           <a:p>
-            <a:pPr indent="0" marL="0">
+            <a:pPr marL="0" indent="0">
               <a:buNone/>
             </a:pPr>
             <a:r>
@@ -12009,7 +11514,7 @@
           <a:bodyPr wrap="square" rtlCol="0" anchor="ctr"/>
           <a:lstStyle/>
           <a:p>
-            <a:pPr indent="0" marL="0">
+            <a:pPr marL="0" indent="0">
               <a:buNone/>
             </a:pPr>
             <a:r>
@@ -12074,7 +11579,7 @@
           <a:bodyPr wrap="square" rtlCol="0" anchor="ctr"/>
           <a:lstStyle/>
           <a:p>
-            <a:pPr indent="0" marL="0">
+            <a:pPr marL="0" indent="0">
               <a:buNone/>
             </a:pPr>
             <a:r>
@@ -12139,7 +11644,7 @@
           <a:bodyPr wrap="square" rtlCol="0" anchor="ctr"/>
           <a:lstStyle/>
           <a:p>
-            <a:pPr indent="0" marL="0">
+            <a:pPr marL="0" indent="0">
               <a:buNone/>
             </a:pPr>
             <a:r>
@@ -12204,7 +11709,7 @@
           <a:bodyPr wrap="square" rtlCol="0" anchor="ctr"/>
           <a:lstStyle/>
           <a:p>
-            <a:pPr indent="0" marL="0">
+            <a:pPr marL="0" indent="0">
               <a:buNone/>
             </a:pPr>
             <a:r>
@@ -12265,7 +11770,7 @@
           <a:bodyPr wrap="square" lIns="0" tIns="0" rIns="0" bIns="0" rtlCol="0" anchor="ctr"/>
           <a:lstStyle/>
           <a:p>
-            <a:pPr algn="ctr" indent="0" marL="0">
+            <a:pPr marL="0" indent="0" algn="ctr">
               <a:buNone/>
             </a:pPr>
             <a:r>
@@ -12304,7 +11809,7 @@
             <a:prstDash val="solid"/>
           </a:ln>
           <a:effectLst>
-            <a:outerShdw sx="100000" sy="100000" kx="0" ky="0" algn="bl" rotWithShape="0" blurRad="101600" dist="38100" dir="8100000">
+            <a:outerShdw blurRad="101600" dist="38100" dir="8100000" algn="bl" rotWithShape="0">
               <a:srgbClr val="000000">
                 <a:alpha val="12000"/>
               </a:srgbClr>
@@ -12362,7 +11867,7 @@
           <a:bodyPr wrap="square" rtlCol="0" anchor="ctr"/>
           <a:lstStyle/>
           <a:p>
-            <a:pPr indent="0" marL="0">
+            <a:pPr marL="0" indent="0">
               <a:buNone/>
             </a:pPr>
             <a:r>
@@ -12427,7 +11932,7 @@
           <a:bodyPr wrap="square" rtlCol="0" anchor="ctr"/>
           <a:lstStyle/>
           <a:p>
-            <a:pPr indent="0" marL="0">
+            <a:pPr marL="0" indent="0">
               <a:buNone/>
             </a:pPr>
             <a:r>
@@ -12492,7 +11997,7 @@
           <a:bodyPr wrap="square" rtlCol="0" anchor="ctr"/>
           <a:lstStyle/>
           <a:p>
-            <a:pPr indent="0" marL="0">
+            <a:pPr marL="0" indent="0">
               <a:buNone/>
             </a:pPr>
             <a:r>
@@ -12557,7 +12062,7 @@
           <a:bodyPr wrap="square" rtlCol="0" anchor="ctr"/>
           <a:lstStyle/>
           <a:p>
-            <a:pPr indent="0" marL="0">
+            <a:pPr marL="0" indent="0">
               <a:buNone/>
             </a:pPr>
             <a:r>
@@ -12622,7 +12127,7 @@
           <a:bodyPr wrap="square" rtlCol="0" anchor="ctr"/>
           <a:lstStyle/>
           <a:p>
-            <a:pPr indent="0" marL="0">
+            <a:pPr marL="0" indent="0">
               <a:buNone/>
             </a:pPr>
             <a:r>
@@ -12687,7 +12192,7 @@
           <a:bodyPr wrap="square" rtlCol="0" anchor="ctr"/>
           <a:lstStyle/>
           <a:p>
-            <a:pPr indent="0" marL="0">
+            <a:pPr marL="0" indent="0">
               <a:buNone/>
             </a:pPr>
             <a:r>
@@ -12752,7 +12257,7 @@
           <a:bodyPr wrap="square" rtlCol="0" anchor="ctr"/>
           <a:lstStyle/>
           <a:p>
-            <a:pPr indent="0" marL="0">
+            <a:pPr marL="0" indent="0">
               <a:buNone/>
             </a:pPr>
             <a:r>
@@ -12817,7 +12322,7 @@
           <a:bodyPr wrap="square" rtlCol="0" anchor="ctr"/>
           <a:lstStyle/>
           <a:p>
-            <a:pPr indent="0" marL="0">
+            <a:pPr marL="0" indent="0">
               <a:buNone/>
             </a:pPr>
             <a:r>
@@ -12882,7 +12387,7 @@
           <a:bodyPr wrap="square" rtlCol="0" anchor="ctr"/>
           <a:lstStyle/>
           <a:p>
-            <a:pPr indent="0" marL="0">
+            <a:pPr marL="0" indent="0">
               <a:buNone/>
             </a:pPr>
             <a:r>
@@ -12943,7 +12448,7 @@
           <a:bodyPr wrap="square" lIns="0" tIns="0" rIns="0" bIns="0" rtlCol="0" anchor="ctr"/>
           <a:lstStyle/>
           <a:p>
-            <a:pPr algn="ctr" indent="0" marL="0">
+            <a:pPr marL="0" indent="0" algn="ctr">
               <a:buNone/>
             </a:pPr>
             <a:r>
@@ -12982,7 +12487,7 @@
             <a:prstDash val="solid"/>
           </a:ln>
           <a:effectLst>
-            <a:outerShdw sx="100000" sy="100000" kx="0" ky="0" algn="bl" rotWithShape="0" blurRad="101600" dist="38100" dir="8100000">
+            <a:outerShdw blurRad="101600" dist="38100" dir="8100000" algn="bl" rotWithShape="0">
               <a:srgbClr val="000000">
                 <a:alpha val="12000"/>
               </a:srgbClr>
@@ -13040,7 +12545,7 @@
           <a:bodyPr wrap="square" rtlCol="0" anchor="ctr"/>
           <a:lstStyle/>
           <a:p>
-            <a:pPr indent="0" marL="0">
+            <a:pPr marL="0" indent="0">
               <a:buNone/>
             </a:pPr>
             <a:r>
@@ -13105,7 +12610,7 @@
           <a:bodyPr wrap="square" rtlCol="0" anchor="ctr"/>
           <a:lstStyle/>
           <a:p>
-            <a:pPr indent="0" marL="0">
+            <a:pPr marL="0" indent="0">
               <a:buNone/>
             </a:pPr>
             <a:r>
@@ -13170,76 +12675,8 @@
           <a:bodyPr wrap="square" rtlCol="0" anchor="ctr"/>
           <a:lstStyle/>
           <a:p>
-            <a:pPr indent="0" marL="0">
-              <a:buNone/>
-            </a:pPr>
-            <a:r>
-              <a:rPr lang="en-US" sz="950" dirty="0">
-                <a:solidFill>
-                  <a:srgbClr val="0D1B4B"/>
-                </a:solidFill>
-              </a:rPr>
-              <a:t>myfiles-reference</a:t>
-            </a:r>
-            <a:endParaRPr lang="en-US" sz="950" dirty="0"/>
-          </a:p>
-        </p:txBody>
-      </p:sp>
-      <p:sp>
-        <p:nvSpPr>
-          <p:cNvPr id="61" name="Shape 59"/>
-          <p:cNvSpPr/>
-          <p:nvPr/>
-        </p:nvSpPr>
-        <p:spPr>
-          <a:xfrm>
-            <a:off x="6089904" y="2688336"/>
-            <a:ext cx="1810512" cy="310896"/>
-          </a:xfrm>
-          <a:prstGeom prst="rect">
-            <a:avLst/>
-          </a:prstGeom>
-          <a:solidFill>
-            <a:srgbClr val="00B4D8">
-              <a:alpha val="12000"/>
-            </a:srgbClr>
-          </a:solidFill>
-          <a:ln w="12700">
-            <a:solidFill>
-              <a:srgbClr val="00B4D8">
-                <a:alpha val="50000"/>
-              </a:srgbClr>
-            </a:solidFill>
-            <a:prstDash val="solid"/>
-          </a:ln>
-        </p:spPr>
-      </p:sp>
-      <p:sp>
-        <p:nvSpPr>
-          <p:cNvPr id="62" name="Text 60"/>
-          <p:cNvSpPr/>
-          <p:nvPr/>
-        </p:nvSpPr>
-        <p:spPr>
-          <a:xfrm>
-            <a:off x="6126480" y="2688336"/>
-            <a:ext cx="1773936" cy="310896"/>
-          </a:xfrm>
-          <a:prstGeom prst="rect">
-            <a:avLst/>
-          </a:prstGeom>
-          <a:noFill/>
-          <a:ln/>
-        </p:spPr>
-        <p:txBody>
-          <a:bodyPr wrap="square" rtlCol="0" anchor="ctr"/>
-          <a:lstStyle/>
-          <a:p>
-            <a:pPr indent="0" marL="0">
-              <a:buNone/>
-            </a:pPr>
-            <a:r>
-              <a:rPr lang="en-US" sz="950" dirty="0">
+            <a:r>
+              <a:rPr lang="en-US" sz="950">
                 <a:solidFill>
                   <a:srgbClr val="0D1B4B"/>
                 </a:solidFill>
@@ -13296,7 +12733,7 @@
           <a:bodyPr wrap="square" lIns="0" tIns="0" rIns="0" bIns="0" rtlCol="0" anchor="ctr"/>
           <a:lstStyle/>
           <a:p>
-            <a:pPr algn="ctr" indent="0" marL="0">
+            <a:pPr marL="0" indent="0" algn="ctr">
               <a:buNone/>
             </a:pPr>
             <a:r>
@@ -13335,7 +12772,7 @@
             <a:prstDash val="solid"/>
           </a:ln>
           <a:effectLst>
-            <a:outerShdw sx="100000" sy="100000" kx="0" ky="0" algn="bl" rotWithShape="0" blurRad="101600" dist="38100" dir="8100000">
+            <a:outerShdw blurRad="101600" dist="38100" dir="8100000" algn="bl" rotWithShape="0">
               <a:srgbClr val="000000">
                 <a:alpha val="12000"/>
               </a:srgbClr>
@@ -13393,7 +12830,7 @@
           <a:bodyPr wrap="square" rtlCol="0" anchor="ctr"/>
           <a:lstStyle/>
           <a:p>
-            <a:pPr indent="0" marL="0">
+            <a:pPr marL="0" indent="0">
               <a:buNone/>
             </a:pPr>
             <a:r>
@@ -13458,7 +12895,7 @@
           <a:bodyPr wrap="square" rtlCol="0" anchor="ctr"/>
           <a:lstStyle/>
           <a:p>
-            <a:pPr indent="0" marL="0">
+            <a:pPr marL="0" indent="0">
               <a:buNone/>
             </a:pPr>
             <a:r>
@@ -13494,7 +12931,7 @@
           <a:bodyPr wrap="square" rtlCol="0" anchor="ctr"/>
           <a:lstStyle/>
           <a:p>
-            <a:pPr algn="r" indent="0" marL="0">
+            <a:pPr marL="0" indent="0" algn="r">
               <a:buNone/>
             </a:pPr>
             <a:r>
@@ -13525,6 +12962,7 @@
         <a:solidFill>
           <a:srgbClr val="F4F8FA"/>
         </a:solidFill>
+        <a:effectLst/>
       </p:bgPr>
     </p:bg>
     <p:spTree>
@@ -13614,7 +13052,7 @@
           <a:bodyPr wrap="square" lIns="0" tIns="0" rIns="0" bIns="0" rtlCol="0" anchor="ctr"/>
           <a:lstStyle/>
           <a:p>
-            <a:pPr algn="ctr" indent="0" marL="0">
+            <a:pPr marL="0" indent="0" algn="ctr">
               <a:buNone/>
             </a:pPr>
             <a:r>
@@ -13650,7 +13088,7 @@
           <a:bodyPr wrap="square" rtlCol="0" anchor="ctr"/>
           <a:lstStyle/>
           <a:p>
-            <a:pPr indent="0" marL="0">
+            <a:pPr marL="0" indent="0">
               <a:buNone/>
             </a:pPr>
             <a:r>
@@ -13692,7 +13130,7 @@
             <a:prstDash val="solid"/>
           </a:ln>
           <a:effectLst>
-            <a:outerShdw sx="100000" sy="100000" kx="0" ky="0" algn="bl" rotWithShape="0" blurRad="101600" dist="38100" dir="8100000">
+            <a:outerShdw blurRad="101600" dist="38100" dir="8100000" algn="bl" rotWithShape="0">
               <a:srgbClr val="000000">
                 <a:alpha val="12000"/>
               </a:srgbClr>
@@ -13746,7 +13184,7 @@
           <a:bodyPr wrap="square" rtlCol="0" anchor="ctr"/>
           <a:lstStyle/>
           <a:p>
-            <a:pPr indent="0" marL="0">
+            <a:pPr marL="0" indent="0">
               <a:buNone/>
             </a:pPr>
             <a:r>
@@ -13782,7 +13220,7 @@
           <a:bodyPr wrap="square" rtlCol="0" anchor="ctr"/>
           <a:lstStyle/>
           <a:p>
-            <a:pPr indent="0" marL="0">
+            <a:pPr marL="0" indent="0">
               <a:buNone/>
             </a:pPr>
             <a:r>
@@ -13793,9 +13231,6 @@
               </a:rPr>
               <a:t>Đọc TRƯỚC TIÊN </a:t>
             </a:r>
-            <a:pPr indent="0" marL="0">
-              <a:buNone/>
-            </a:pPr>
             <a:r>
               <a:rPr lang="en-US" sz="1150" dirty="0">
                 <a:solidFill>
@@ -13832,7 +13267,7 @@
             <a:prstDash val="solid"/>
           </a:ln>
           <a:effectLst>
-            <a:outerShdw sx="100000" sy="100000" kx="0" ky="0" algn="bl" rotWithShape="0" blurRad="101600" dist="38100" dir="8100000">
+            <a:outerShdw blurRad="101600" dist="38100" dir="8100000" algn="bl" rotWithShape="0">
               <a:srgbClr val="000000">
                 <a:alpha val="12000"/>
               </a:srgbClr>
@@ -13886,7 +13321,7 @@
           <a:bodyPr wrap="square" rtlCol="0" anchor="ctr"/>
           <a:lstStyle/>
           <a:p>
-            <a:pPr indent="0" marL="0">
+            <a:pPr marL="0" indent="0">
               <a:buNone/>
             </a:pPr>
             <a:r>
@@ -13922,7 +13357,7 @@
           <a:bodyPr wrap="square" rtlCol="0" anchor="ctr"/>
           <a:lstStyle/>
           <a:p>
-            <a:pPr indent="0" marL="0">
+            <a:pPr marL="0" indent="0">
               <a:buNone/>
             </a:pPr>
             <a:r>
@@ -13961,7 +13396,7 @@
             <a:prstDash val="solid"/>
           </a:ln>
           <a:effectLst>
-            <a:outerShdw sx="100000" sy="100000" kx="0" ky="0" algn="bl" rotWithShape="0" blurRad="101600" dist="38100" dir="8100000">
+            <a:outerShdw blurRad="101600" dist="38100" dir="8100000" algn="bl" rotWithShape="0">
               <a:srgbClr val="000000">
                 <a:alpha val="12000"/>
               </a:srgbClr>
@@ -14015,7 +13450,7 @@
           <a:bodyPr wrap="square" rtlCol="0" anchor="ctr"/>
           <a:lstStyle/>
           <a:p>
-            <a:pPr indent="0" marL="0">
+            <a:pPr marL="0" indent="0">
               <a:buNone/>
             </a:pPr>
             <a:r>
@@ -14051,7 +13486,7 @@
           <a:bodyPr wrap="square" rtlCol="0" anchor="ctr"/>
           <a:lstStyle/>
           <a:p>
-            <a:pPr indent="0" marL="0">
+            <a:pPr marL="0" indent="0">
               <a:buNone/>
             </a:pPr>
             <a:r>
@@ -14087,7 +13522,7 @@
           <a:bodyPr wrap="square" rtlCol="0" anchor="ctr"/>
           <a:lstStyle/>
           <a:p>
-            <a:pPr indent="0" marL="0">
+            <a:pPr marL="0" indent="0">
               <a:buNone/>
             </a:pPr>
             <a:r>
@@ -14123,7 +13558,7 @@
           <a:bodyPr wrap="square" rtlCol="0" anchor="ctr"/>
           <a:lstStyle/>
           <a:p>
-            <a:pPr indent="0" marL="0">
+            <a:pPr marL="0" indent="0">
               <a:buNone/>
             </a:pPr>
             <a:r>
@@ -14159,7 +13594,7 @@
           <a:bodyPr wrap="square" rtlCol="0" anchor="ctr"/>
           <a:lstStyle/>
           <a:p>
-            <a:pPr indent="0" marL="0">
+            <a:pPr marL="0" indent="0">
               <a:buNone/>
             </a:pPr>
             <a:r>
@@ -14195,7 +13630,7 @@
           <a:bodyPr wrap="square" rtlCol="0" anchor="ctr"/>
           <a:lstStyle/>
           <a:p>
-            <a:pPr indent="0" marL="0">
+            <a:pPr marL="0" indent="0">
               <a:buNone/>
             </a:pPr>
             <a:r>
@@ -14231,7 +13666,7 @@
           <a:bodyPr wrap="square" rtlCol="0" anchor="ctr"/>
           <a:lstStyle/>
           <a:p>
-            <a:pPr indent="0" marL="0">
+            <a:pPr marL="0" indent="0">
               <a:buNone/>
             </a:pPr>
             <a:r>
@@ -14270,7 +13705,7 @@
             <a:prstDash val="solid"/>
           </a:ln>
           <a:effectLst>
-            <a:outerShdw sx="100000" sy="100000" kx="0" ky="0" algn="bl" rotWithShape="0" blurRad="101600" dist="38100" dir="8100000">
+            <a:outerShdw blurRad="101600" dist="38100" dir="8100000" algn="bl" rotWithShape="0">
               <a:srgbClr val="000000">
                 <a:alpha val="12000"/>
               </a:srgbClr>
@@ -14324,7 +13759,7 @@
           <a:bodyPr wrap="square" rtlCol="0" anchor="ctr"/>
           <a:lstStyle/>
           <a:p>
-            <a:pPr indent="0" marL="0">
+            <a:pPr marL="0" indent="0">
               <a:buNone/>
             </a:pPr>
             <a:r>
@@ -14360,7 +13795,7 @@
           <a:bodyPr wrap="square" rtlCol="0" anchor="ctr"/>
           <a:lstStyle/>
           <a:p>
-            <a:pPr indent="0" marL="0">
+            <a:pPr marL="0" indent="0">
               <a:buNone/>
             </a:pPr>
             <a:r>
@@ -14450,7 +13885,7 @@
           <a:bodyPr wrap="square" rtlCol="0" anchor="ctr"/>
           <a:lstStyle/>
           <a:p>
-            <a:pPr indent="0" marL="0">
+            <a:pPr marL="0" indent="0">
               <a:buNone/>
             </a:pPr>
             <a:r>
@@ -14540,7 +13975,7 @@
           <a:bodyPr wrap="square" rtlCol="0" anchor="ctr"/>
           <a:lstStyle/>
           <a:p>
-            <a:pPr indent="0" marL="0">
+            <a:pPr marL="0" indent="0">
               <a:buNone/>
             </a:pPr>
             <a:r>
@@ -14630,7 +14065,7 @@
           <a:bodyPr wrap="square" rtlCol="0" anchor="ctr"/>
           <a:lstStyle/>
           <a:p>
-            <a:pPr indent="0" marL="0">
+            <a:pPr marL="0" indent="0">
               <a:buNone/>
             </a:pPr>
             <a:r>
@@ -14720,7 +14155,7 @@
           <a:bodyPr wrap="square" rtlCol="0" anchor="ctr"/>
           <a:lstStyle/>
           <a:p>
-            <a:pPr indent="0" marL="0">
+            <a:pPr marL="0" indent="0">
               <a:buNone/>
             </a:pPr>
             <a:r>
@@ -14810,7 +14245,7 @@
           <a:bodyPr wrap="square" rtlCol="0" anchor="ctr"/>
           <a:lstStyle/>
           <a:p>
-            <a:pPr indent="0" marL="0">
+            <a:pPr marL="0" indent="0">
               <a:buNone/>
             </a:pPr>
             <a:r>
@@ -14846,7 +14281,7 @@
           <a:bodyPr wrap="square" rtlCol="0" anchor="ctr"/>
           <a:lstStyle/>
           <a:p>
-            <a:pPr algn="r" indent="0" marL="0">
+            <a:pPr marL="0" indent="0" algn="r">
               <a:buNone/>
             </a:pPr>
             <a:r>
@@ -14877,6 +14312,7 @@
         <a:solidFill>
           <a:srgbClr val="F4F8FA"/>
         </a:solidFill>
+        <a:effectLst/>
       </p:bgPr>
     </p:bg>
     <p:spTree>
@@ -14966,7 +14402,7 @@
           <a:bodyPr wrap="square" lIns="0" tIns="0" rIns="0" bIns="0" rtlCol="0" anchor="ctr"/>
           <a:lstStyle/>
           <a:p>
-            <a:pPr algn="ctr" indent="0" marL="0">
+            <a:pPr marL="0" indent="0" algn="ctr">
               <a:buNone/>
             </a:pPr>
             <a:r>
@@ -15002,7 +14438,7 @@
           <a:bodyPr wrap="square" rtlCol="0" anchor="ctr"/>
           <a:lstStyle/>
           <a:p>
-            <a:pPr indent="0" marL="0">
+            <a:pPr marL="0" indent="0">
               <a:buNone/>
             </a:pPr>
             <a:r>
@@ -15041,7 +14477,7 @@
           <a:bodyPr wrap="square" rtlCol="0" anchor="ctr"/>
           <a:lstStyle/>
           <a:p>
-            <a:pPr indent="0" marL="0">
+            <a:pPr marL="0" indent="0">
               <a:buNone/>
             </a:pPr>
             <a:r>
@@ -15083,7 +14519,7 @@
             <a:prstDash val="solid"/>
           </a:ln>
           <a:effectLst>
-            <a:outerShdw sx="100000" sy="100000" kx="0" ky="0" algn="bl" rotWithShape="0" blurRad="101600" dist="38100" dir="8100000">
+            <a:outerShdw blurRad="101600" dist="38100" dir="8100000" algn="bl" rotWithShape="0">
               <a:srgbClr val="000000">
                 <a:alpha val="12000"/>
               </a:srgbClr>
@@ -15137,7 +14573,7 @@
           <a:bodyPr wrap="square" rtlCol="0" anchor="ctr"/>
           <a:lstStyle/>
           <a:p>
-            <a:pPr indent="0" marL="0">
+            <a:pPr marL="0" indent="0">
               <a:buNone/>
             </a:pPr>
             <a:r>
@@ -15173,7 +14609,7 @@
           <a:bodyPr wrap="square" rtlCol="0" anchor="ctr"/>
           <a:lstStyle/>
           <a:p>
-            <a:pPr indent="0" marL="0">
+            <a:pPr marL="0" indent="0">
               <a:buNone/>
             </a:pPr>
             <a:r>
@@ -15209,7 +14645,7 @@
           <a:bodyPr wrap="square" rtlCol="0" anchor="ctr"/>
           <a:lstStyle/>
           <a:p>
-            <a:pPr indent="0" marL="0">
+            <a:pPr marL="0" indent="0">
               <a:buNone/>
             </a:pPr>
             <a:r>
@@ -15245,7 +14681,7 @@
           <a:bodyPr wrap="square" rtlCol="0" anchor="ctr"/>
           <a:lstStyle/>
           <a:p>
-            <a:pPr indent="0" marL="0">
+            <a:pPr marL="0" indent="0">
               <a:buNone/>
             </a:pPr>
             <a:r>
@@ -15281,7 +14717,7 @@
           <a:bodyPr wrap="square" rtlCol="0" anchor="ctr"/>
           <a:lstStyle/>
           <a:p>
-            <a:pPr indent="0" marL="0">
+            <a:pPr marL="0" indent="0">
               <a:buNone/>
             </a:pPr>
             <a:r>
@@ -15317,7 +14753,7 @@
           <a:bodyPr wrap="square" rtlCol="0" anchor="ctr"/>
           <a:lstStyle/>
           <a:p>
-            <a:pPr indent="0" marL="0">
+            <a:pPr marL="0" indent="0">
               <a:buNone/>
             </a:pPr>
             <a:r>
@@ -15353,7 +14789,7 @@
           <a:bodyPr wrap="square" rtlCol="0" anchor="ctr"/>
           <a:lstStyle/>
           <a:p>
-            <a:pPr indent="0" marL="0">
+            <a:pPr marL="0" indent="0">
               <a:buNone/>
             </a:pPr>
             <a:r>
@@ -15389,7 +14825,7 @@
           <a:bodyPr wrap="square" rtlCol="0" anchor="ctr"/>
           <a:lstStyle/>
           <a:p>
-            <a:pPr indent="0" marL="0">
+            <a:pPr marL="0" indent="0">
               <a:buNone/>
             </a:pPr>
             <a:r>
@@ -15454,7 +14890,7 @@
           <a:bodyPr wrap="square" rtlCol="0" anchor="ctr"/>
           <a:lstStyle/>
           <a:p>
-            <a:pPr indent="0" marL="0">
+            <a:pPr marL="0" indent="0">
               <a:buNone/>
             </a:pPr>
             <a:r>
@@ -15493,7 +14929,7 @@
             <a:prstDash val="solid"/>
           </a:ln>
           <a:effectLst>
-            <a:outerShdw sx="100000" sy="100000" kx="0" ky="0" algn="bl" rotWithShape="0" blurRad="101600" dist="38100" dir="8100000">
+            <a:outerShdw blurRad="101600" dist="38100" dir="8100000" algn="bl" rotWithShape="0">
               <a:srgbClr val="000000">
                 <a:alpha val="12000"/>
               </a:srgbClr>
@@ -15547,7 +14983,7 @@
           <a:bodyPr wrap="square" rtlCol="0" anchor="ctr"/>
           <a:lstStyle/>
           <a:p>
-            <a:pPr indent="0" marL="0">
+            <a:pPr marL="0" indent="0">
               <a:buNone/>
             </a:pPr>
             <a:r>
@@ -15583,7 +15019,7 @@
           <a:bodyPr wrap="square" rtlCol="0" anchor="ctr"/>
           <a:lstStyle/>
           <a:p>
-            <a:pPr indent="0" marL="0">
+            <a:pPr marL="0" indent="0">
               <a:buNone/>
             </a:pPr>
             <a:r>
@@ -15619,7 +15055,7 @@
           <a:bodyPr wrap="square" rtlCol="0" anchor="ctr"/>
           <a:lstStyle/>
           <a:p>
-            <a:pPr indent="0" marL="0">
+            <a:pPr marL="0" indent="0">
               <a:buNone/>
             </a:pPr>
             <a:r>
@@ -15655,7 +15091,7 @@
           <a:bodyPr wrap="square" rtlCol="0" anchor="ctr"/>
           <a:lstStyle/>
           <a:p>
-            <a:pPr indent="0" marL="0">
+            <a:pPr marL="0" indent="0">
               <a:buNone/>
             </a:pPr>
             <a:r>
@@ -15691,7 +15127,7 @@
           <a:bodyPr wrap="square" rtlCol="0" anchor="ctr"/>
           <a:lstStyle/>
           <a:p>
-            <a:pPr indent="0" marL="0">
+            <a:pPr marL="0" indent="0">
               <a:buNone/>
             </a:pPr>
             <a:r>
@@ -15727,7 +15163,7 @@
           <a:bodyPr wrap="square" rtlCol="0" anchor="ctr"/>
           <a:lstStyle/>
           <a:p>
-            <a:pPr indent="0" marL="0">
+            <a:pPr marL="0" indent="0">
               <a:buNone/>
             </a:pPr>
             <a:r>
@@ -15763,7 +15199,7 @@
           <a:bodyPr wrap="square" rtlCol="0" anchor="ctr"/>
           <a:lstStyle/>
           <a:p>
-            <a:pPr indent="0" marL="0">
+            <a:pPr marL="0" indent="0">
               <a:buNone/>
             </a:pPr>
             <a:r>
@@ -15799,7 +15235,7 @@
           <a:bodyPr wrap="square" rtlCol="0" anchor="ctr"/>
           <a:lstStyle/>
           <a:p>
-            <a:pPr indent="0" marL="0">
+            <a:pPr marL="0" indent="0">
               <a:buNone/>
             </a:pPr>
             <a:r>
@@ -15864,7 +15300,7 @@
           <a:bodyPr wrap="square" rtlCol="0" anchor="ctr"/>
           <a:lstStyle/>
           <a:p>
-            <a:pPr indent="0" marL="0">
+            <a:pPr marL="0" indent="0">
               <a:buNone/>
             </a:pPr>
             <a:r>
@@ -15900,7 +15336,7 @@
           <a:bodyPr wrap="square" rtlCol="0" anchor="ctr"/>
           <a:lstStyle/>
           <a:p>
-            <a:pPr algn="r" indent="0" marL="0">
+            <a:pPr marL="0" indent="0" algn="r">
               <a:buNone/>
             </a:pPr>
             <a:r>
@@ -15931,6 +15367,7 @@
         <a:solidFill>
           <a:srgbClr val="F4F8FA"/>
         </a:solidFill>
+        <a:effectLst/>
       </p:bgPr>
     </p:bg>
     <p:spTree>
@@ -16020,7 +15457,7 @@
           <a:bodyPr wrap="square" lIns="0" tIns="0" rIns="0" bIns="0" rtlCol="0" anchor="ctr"/>
           <a:lstStyle/>
           <a:p>
-            <a:pPr algn="ctr" indent="0" marL="0">
+            <a:pPr marL="0" indent="0" algn="ctr">
               <a:buNone/>
             </a:pPr>
             <a:r>
@@ -16056,7 +15493,7 @@
           <a:bodyPr wrap="square" rtlCol="0" anchor="ctr"/>
           <a:lstStyle/>
           <a:p>
-            <a:pPr indent="0" marL="0">
+            <a:pPr marL="0" indent="0">
               <a:buNone/>
             </a:pPr>
             <a:r>
@@ -16098,7 +15535,7 @@
             <a:prstDash val="solid"/>
           </a:ln>
           <a:effectLst>
-            <a:outerShdw sx="100000" sy="100000" kx="0" ky="0" algn="bl" rotWithShape="0" blurRad="101600" dist="38100" dir="8100000">
+            <a:outerShdw blurRad="101600" dist="38100" dir="8100000" algn="bl" rotWithShape="0">
               <a:srgbClr val="000000">
                 <a:alpha val="12000"/>
               </a:srgbClr>
@@ -16152,7 +15589,7 @@
           <a:bodyPr wrap="square" rtlCol="0" anchor="ctr"/>
           <a:lstStyle/>
           <a:p>
-            <a:pPr indent="0" marL="0">
+            <a:pPr marL="0" indent="0">
               <a:buNone/>
             </a:pPr>
             <a:r>
@@ -16188,7 +15625,7 @@
           <a:bodyPr wrap="square" rtlCol="0" anchor="ctr"/>
           <a:lstStyle/>
           <a:p>
-            <a:pPr indent="0" marL="0">
+            <a:pPr marL="0" indent="0">
               <a:buNone/>
             </a:pPr>
             <a:r>
@@ -16224,7 +15661,7 @@
           <a:bodyPr wrap="square" rtlCol="0" anchor="ctr"/>
           <a:lstStyle/>
           <a:p>
-            <a:pPr indent="0" marL="0">
+            <a:pPr marL="0" indent="0">
               <a:buNone/>
             </a:pPr>
             <a:r>
@@ -16289,7 +15726,7 @@
           <a:bodyPr wrap="square" rtlCol="0" anchor="ctr"/>
           <a:lstStyle/>
           <a:p>
-            <a:pPr indent="0" marL="0">
+            <a:pPr marL="0" indent="0">
               <a:buNone/>
             </a:pPr>
             <a:r>
@@ -16325,7 +15762,7 @@
           <a:bodyPr wrap="square" rtlCol="0" anchor="ctr"/>
           <a:lstStyle/>
           <a:p>
-            <a:pPr indent="0" marL="0">
+            <a:pPr marL="0" indent="0">
               <a:buNone/>
             </a:pPr>
             <a:r>
@@ -16390,7 +15827,7 @@
           <a:bodyPr wrap="square" rtlCol="0" anchor="ctr"/>
           <a:lstStyle/>
           <a:p>
-            <a:pPr indent="0" marL="0">
+            <a:pPr marL="0" indent="0">
               <a:buNone/>
             </a:pPr>
             <a:r>
@@ -16426,7 +15863,7 @@
           <a:bodyPr wrap="square" rtlCol="0" anchor="ctr"/>
           <a:lstStyle/>
           <a:p>
-            <a:pPr indent="0" marL="0">
+            <a:pPr marL="0" indent="0">
               <a:buNone/>
             </a:pPr>
             <a:r>
@@ -16491,7 +15928,7 @@
           <a:bodyPr wrap="square" rtlCol="0" anchor="ctr"/>
           <a:lstStyle/>
           <a:p>
-            <a:pPr indent="0" marL="0">
+            <a:pPr marL="0" indent="0">
               <a:buNone/>
             </a:pPr>
             <a:r>
@@ -16527,7 +15964,7 @@
           <a:bodyPr wrap="square" rtlCol="0" anchor="ctr"/>
           <a:lstStyle/>
           <a:p>
-            <a:pPr indent="0" marL="0">
+            <a:pPr marL="0" indent="0">
               <a:buNone/>
             </a:pPr>
             <a:r>
@@ -16592,7 +16029,7 @@
           <a:bodyPr wrap="square" rtlCol="0" anchor="ctr"/>
           <a:lstStyle/>
           <a:p>
-            <a:pPr indent="0" marL="0">
+            <a:pPr marL="0" indent="0">
               <a:buNone/>
             </a:pPr>
             <a:r>
@@ -16628,7 +16065,7 @@
           <a:bodyPr wrap="square" rtlCol="0" anchor="ctr"/>
           <a:lstStyle/>
           <a:p>
-            <a:pPr indent="0" marL="0">
+            <a:pPr marL="0" indent="0">
               <a:buNone/>
             </a:pPr>
             <a:r>
@@ -16693,7 +16130,7 @@
           <a:bodyPr wrap="square" rtlCol="0" anchor="ctr"/>
           <a:lstStyle/>
           <a:p>
-            <a:pPr indent="0" marL="0">
+            <a:pPr marL="0" indent="0">
               <a:buNone/>
             </a:pPr>
             <a:r>
@@ -16729,7 +16166,7 @@
           <a:bodyPr wrap="square" rtlCol="0" anchor="ctr"/>
           <a:lstStyle/>
           <a:p>
-            <a:pPr indent="0" marL="0">
+            <a:pPr marL="0" indent="0">
               <a:buNone/>
             </a:pPr>
             <a:r>
@@ -16794,7 +16231,7 @@
           <a:bodyPr wrap="square" rtlCol="0" anchor="ctr"/>
           <a:lstStyle/>
           <a:p>
-            <a:pPr indent="0" marL="0">
+            <a:pPr marL="0" indent="0">
               <a:buNone/>
             </a:pPr>
             <a:r>
@@ -16830,7 +16267,7 @@
           <a:bodyPr wrap="square" rtlCol="0" anchor="ctr"/>
           <a:lstStyle/>
           <a:p>
-            <a:pPr indent="0" marL="0">
+            <a:pPr marL="0" indent="0">
               <a:buNone/>
             </a:pPr>
             <a:r>
@@ -16895,7 +16332,7 @@
           <a:bodyPr wrap="square" rtlCol="0" anchor="ctr"/>
           <a:lstStyle/>
           <a:p>
-            <a:pPr indent="0" marL="0">
+            <a:pPr marL="0" indent="0">
               <a:buNone/>
             </a:pPr>
             <a:r>
@@ -16931,7 +16368,7 @@
           <a:bodyPr wrap="square" rtlCol="0" anchor="ctr"/>
           <a:lstStyle/>
           <a:p>
-            <a:pPr indent="0" marL="0">
+            <a:pPr marL="0" indent="0">
               <a:buNone/>
             </a:pPr>
             <a:r>
@@ -16996,7 +16433,7 @@
           <a:bodyPr wrap="square" rtlCol="0" anchor="ctr"/>
           <a:lstStyle/>
           <a:p>
-            <a:pPr indent="0" marL="0">
+            <a:pPr marL="0" indent="0">
               <a:buNone/>
             </a:pPr>
             <a:r>
@@ -17032,7 +16469,7 @@
           <a:bodyPr wrap="square" rtlCol="0" anchor="ctr"/>
           <a:lstStyle/>
           <a:p>
-            <a:pPr indent="0" marL="0">
+            <a:pPr marL="0" indent="0">
               <a:buNone/>
             </a:pPr>
             <a:r>
@@ -17071,7 +16508,7 @@
             <a:prstDash val="solid"/>
           </a:ln>
           <a:effectLst>
-            <a:outerShdw sx="100000" sy="100000" kx="0" ky="0" algn="bl" rotWithShape="0" blurRad="101600" dist="38100" dir="8100000">
+            <a:outerShdw blurRad="101600" dist="38100" dir="8100000" algn="bl" rotWithShape="0">
               <a:srgbClr val="000000">
                 <a:alpha val="12000"/>
               </a:srgbClr>
@@ -17125,7 +16562,7 @@
           <a:bodyPr wrap="square" rtlCol="0" anchor="ctr"/>
           <a:lstStyle/>
           <a:p>
-            <a:pPr indent="0" marL="0">
+            <a:pPr marL="0" indent="0">
               <a:buNone/>
             </a:pPr>
             <a:r>
@@ -17161,7 +16598,7 @@
           <a:bodyPr wrap="square" rtlCol="0" anchor="ctr"/>
           <a:lstStyle/>
           <a:p>
-            <a:pPr indent="0" marL="0">
+            <a:pPr marL="0" indent="0">
               <a:buNone/>
             </a:pPr>
             <a:r>
@@ -17197,7 +16634,7 @@
           <a:bodyPr wrap="square" rtlCol="0" anchor="ctr"/>
           <a:lstStyle/>
           <a:p>
-            <a:pPr indent="0" marL="0">
+            <a:pPr marL="0" indent="0">
               <a:buNone/>
             </a:pPr>
             <a:r>
@@ -17233,7 +16670,7 @@
           <a:bodyPr wrap="square" rtlCol="0" anchor="ctr"/>
           <a:lstStyle/>
           <a:p>
-            <a:pPr indent="0" marL="0">
+            <a:pPr marL="0" indent="0">
               <a:buNone/>
             </a:pPr>
             <a:r>
@@ -17269,7 +16706,7 @@
           <a:bodyPr wrap="square" rtlCol="0" anchor="ctr"/>
           <a:lstStyle/>
           <a:p>
-            <a:pPr indent="0" marL="0">
+            <a:pPr marL="0" indent="0">
               <a:buNone/>
             </a:pPr>
             <a:r>
@@ -17305,7 +16742,7 @@
           <a:bodyPr wrap="square" rtlCol="0" anchor="ctr"/>
           <a:lstStyle/>
           <a:p>
-            <a:pPr indent="0" marL="0">
+            <a:pPr marL="0" indent="0">
               <a:buNone/>
             </a:pPr>
             <a:r>
@@ -17344,7 +16781,7 @@
             <a:prstDash val="solid"/>
           </a:ln>
           <a:effectLst>
-            <a:outerShdw sx="100000" sy="100000" kx="0" ky="0" algn="bl" rotWithShape="0" blurRad="101600" dist="38100" dir="8100000">
+            <a:outerShdw blurRad="101600" dist="38100" dir="8100000" algn="bl" rotWithShape="0">
               <a:srgbClr val="000000">
                 <a:alpha val="12000"/>
               </a:srgbClr>
@@ -17398,7 +16835,7 @@
           <a:bodyPr wrap="square" rtlCol="0" anchor="ctr"/>
           <a:lstStyle/>
           <a:p>
-            <a:pPr indent="0" marL="0">
+            <a:pPr marL="0" indent="0">
               <a:buNone/>
             </a:pPr>
             <a:r>
@@ -17434,7 +16871,7 @@
           <a:bodyPr wrap="square" rtlCol="0" anchor="ctr"/>
           <a:lstStyle/>
           <a:p>
-            <a:pPr indent="0" marL="0">
+            <a:pPr marL="0" indent="0">
               <a:buNone/>
             </a:pPr>
             <a:r>
@@ -17470,7 +16907,7 @@
           <a:bodyPr wrap="square" rtlCol="0" anchor="ctr"/>
           <a:lstStyle/>
           <a:p>
-            <a:pPr indent="0" marL="0">
+            <a:pPr marL="0" indent="0">
               <a:buNone/>
             </a:pPr>
             <a:r>
@@ -17506,7 +16943,7 @@
           <a:bodyPr wrap="square" rtlCol="0" anchor="ctr"/>
           <a:lstStyle/>
           <a:p>
-            <a:pPr algn="r" indent="0" marL="0">
+            <a:pPr marL="0" indent="0" algn="r">
               <a:buNone/>
             </a:pPr>
             <a:r>
@@ -17537,6 +16974,7 @@
         <a:solidFill>
           <a:srgbClr val="F4F8FA"/>
         </a:solidFill>
+        <a:effectLst/>
       </p:bgPr>
     </p:bg>
     <p:spTree>
@@ -17626,7 +17064,7 @@
           <a:bodyPr wrap="square" lIns="0" tIns="0" rIns="0" bIns="0" rtlCol="0" anchor="ctr"/>
           <a:lstStyle/>
           <a:p>
-            <a:pPr algn="ctr" indent="0" marL="0">
+            <a:pPr marL="0" indent="0" algn="ctr">
               <a:buNone/>
             </a:pPr>
             <a:r>
@@ -17662,7 +17100,7 @@
           <a:bodyPr wrap="square" rtlCol="0" anchor="ctr"/>
           <a:lstStyle/>
           <a:p>
-            <a:pPr indent="0" marL="0">
+            <a:pPr marL="0" indent="0">
               <a:buNone/>
             </a:pPr>
             <a:r>
@@ -17726,7 +17164,7 @@
           <a:bodyPr wrap="square" lIns="0" tIns="0" rIns="0" bIns="0" rtlCol="0" anchor="ctr"/>
           <a:lstStyle/>
           <a:p>
-            <a:pPr algn="ctr" indent="0" marL="0">
+            <a:pPr marL="0" indent="0" algn="ctr">
               <a:buNone/>
             </a:pPr>
             <a:r>
@@ -17765,7 +17203,7 @@
             <a:prstDash val="solid"/>
           </a:ln>
           <a:effectLst>
-            <a:outerShdw sx="100000" sy="100000" kx="0" ky="0" algn="bl" rotWithShape="0" blurRad="101600" dist="38100" dir="8100000">
+            <a:outerShdw blurRad="101600" dist="38100" dir="8100000" algn="bl" rotWithShape="0">
               <a:srgbClr val="000000">
                 <a:alpha val="12000"/>
               </a:srgbClr>
@@ -17823,7 +17261,7 @@
           <a:bodyPr wrap="square" rtlCol="0" anchor="ctr"/>
           <a:lstStyle/>
           <a:p>
-            <a:pPr indent="0" marL="0">
+            <a:pPr marL="0" indent="0">
               <a:buNone/>
             </a:pPr>
             <a:r>
@@ -17888,7 +17326,7 @@
           <a:bodyPr wrap="square" rtlCol="0" anchor="ctr"/>
           <a:lstStyle/>
           <a:p>
-            <a:pPr indent="0" marL="0">
+            <a:pPr marL="0" indent="0">
               <a:buNone/>
             </a:pPr>
             <a:r>
@@ -17953,7 +17391,7 @@
           <a:bodyPr wrap="square" rtlCol="0" anchor="ctr"/>
           <a:lstStyle/>
           <a:p>
-            <a:pPr indent="0" marL="0">
+            <a:pPr marL="0" indent="0">
               <a:buNone/>
             </a:pPr>
             <a:r>
@@ -18018,7 +17456,7 @@
           <a:bodyPr wrap="square" rtlCol="0" anchor="ctr"/>
           <a:lstStyle/>
           <a:p>
-            <a:pPr indent="0" marL="0">
+            <a:pPr marL="0" indent="0">
               <a:buNone/>
             </a:pPr>
             <a:r>
@@ -18083,7 +17521,7 @@
           <a:bodyPr wrap="square" rtlCol="0" anchor="ctr"/>
           <a:lstStyle/>
           <a:p>
-            <a:pPr indent="0" marL="0">
+            <a:pPr marL="0" indent="0">
               <a:buNone/>
             </a:pPr>
             <a:r>
@@ -18142,7 +17580,7 @@
           <a:bodyPr wrap="square" rtlCol="0" anchor="ctr"/>
           <a:lstStyle/>
           <a:p>
-            <a:pPr indent="0" marL="0">
+            <a:pPr marL="0" indent="0">
               <a:buNone/>
             </a:pPr>
             <a:r>
@@ -18203,7 +17641,7 @@
           <a:bodyPr wrap="square" lIns="0" tIns="0" rIns="0" bIns="0" rtlCol="0" anchor="ctr"/>
           <a:lstStyle/>
           <a:p>
-            <a:pPr algn="ctr" indent="0" marL="0">
+            <a:pPr marL="0" indent="0" algn="ctr">
               <a:buNone/>
             </a:pPr>
             <a:r>
@@ -18242,7 +17680,7 @@
             <a:prstDash val="solid"/>
           </a:ln>
           <a:effectLst>
-            <a:outerShdw sx="100000" sy="100000" kx="0" ky="0" algn="bl" rotWithShape="0" blurRad="101600" dist="38100" dir="8100000">
+            <a:outerShdw blurRad="101600" dist="38100" dir="8100000" algn="bl" rotWithShape="0">
               <a:srgbClr val="000000">
                 <a:alpha val="12000"/>
               </a:srgbClr>
@@ -18300,7 +17738,7 @@
           <a:bodyPr wrap="square" rtlCol="0" anchor="ctr"/>
           <a:lstStyle/>
           <a:p>
-            <a:pPr indent="0" marL="0">
+            <a:pPr marL="0" indent="0">
               <a:buNone/>
             </a:pPr>
             <a:r>
@@ -18365,7 +17803,7 @@
           <a:bodyPr wrap="square" rtlCol="0" anchor="ctr"/>
           <a:lstStyle/>
           <a:p>
-            <a:pPr indent="0" marL="0">
+            <a:pPr marL="0" indent="0">
               <a:buNone/>
             </a:pPr>
             <a:r>
@@ -18430,7 +17868,7 @@
           <a:bodyPr wrap="square" rtlCol="0" anchor="ctr"/>
           <a:lstStyle/>
           <a:p>
-            <a:pPr indent="0" marL="0">
+            <a:pPr marL="0" indent="0">
               <a:buNone/>
             </a:pPr>
             <a:r>
@@ -18495,7 +17933,7 @@
           <a:bodyPr wrap="square" rtlCol="0" anchor="ctr"/>
           <a:lstStyle/>
           <a:p>
-            <a:pPr indent="0" marL="0">
+            <a:pPr marL="0" indent="0">
               <a:buNone/>
             </a:pPr>
             <a:r>
@@ -18560,7 +17998,7 @@
           <a:bodyPr wrap="square" rtlCol="0" anchor="ctr"/>
           <a:lstStyle/>
           <a:p>
-            <a:pPr indent="0" marL="0">
+            <a:pPr marL="0" indent="0">
               <a:buNone/>
             </a:pPr>
             <a:r>
@@ -18619,7 +18057,7 @@
           <a:bodyPr wrap="square" rtlCol="0" anchor="ctr"/>
           <a:lstStyle/>
           <a:p>
-            <a:pPr indent="0" marL="0">
+            <a:pPr marL="0" indent="0">
               <a:buNone/>
             </a:pPr>
             <a:r>
@@ -18680,7 +18118,7 @@
           <a:bodyPr wrap="square" lIns="0" tIns="0" rIns="0" bIns="0" rtlCol="0" anchor="ctr"/>
           <a:lstStyle/>
           <a:p>
-            <a:pPr algn="ctr" indent="0" marL="0">
+            <a:pPr marL="0" indent="0" algn="ctr">
               <a:buNone/>
             </a:pPr>
             <a:r>
@@ -18719,7 +18157,7 @@
             <a:prstDash val="solid"/>
           </a:ln>
           <a:effectLst>
-            <a:outerShdw sx="100000" sy="100000" kx="0" ky="0" algn="bl" rotWithShape="0" blurRad="101600" dist="38100" dir="8100000">
+            <a:outerShdw blurRad="101600" dist="38100" dir="8100000" algn="bl" rotWithShape="0">
               <a:srgbClr val="000000">
                 <a:alpha val="12000"/>
               </a:srgbClr>
@@ -18777,7 +18215,7 @@
           <a:bodyPr wrap="square" rtlCol="0" anchor="ctr"/>
           <a:lstStyle/>
           <a:p>
-            <a:pPr indent="0" marL="0">
+            <a:pPr marL="0" indent="0">
               <a:buNone/>
             </a:pPr>
             <a:r>
@@ -18842,7 +18280,7 @@
           <a:bodyPr wrap="square" rtlCol="0" anchor="ctr"/>
           <a:lstStyle/>
           <a:p>
-            <a:pPr indent="0" marL="0">
+            <a:pPr marL="0" indent="0">
               <a:buNone/>
             </a:pPr>
             <a:r>
@@ -18907,7 +18345,7 @@
           <a:bodyPr wrap="square" rtlCol="0" anchor="ctr"/>
           <a:lstStyle/>
           <a:p>
-            <a:pPr indent="0" marL="0">
+            <a:pPr marL="0" indent="0">
               <a:buNone/>
             </a:pPr>
             <a:r>
@@ -18972,7 +18410,7 @@
           <a:bodyPr wrap="square" rtlCol="0" anchor="ctr"/>
           <a:lstStyle/>
           <a:p>
-            <a:pPr indent="0" marL="0">
+            <a:pPr marL="0" indent="0">
               <a:buNone/>
             </a:pPr>
             <a:r>
@@ -19037,7 +18475,7 @@
           <a:bodyPr wrap="square" rtlCol="0" anchor="ctr"/>
           <a:lstStyle/>
           <a:p>
-            <a:pPr indent="0" marL="0">
+            <a:pPr marL="0" indent="0">
               <a:buNone/>
             </a:pPr>
             <a:r>
@@ -19102,7 +18540,7 @@
           <a:bodyPr wrap="square" rtlCol="0" anchor="ctr"/>
           <a:lstStyle/>
           <a:p>
-            <a:pPr algn="ctr" indent="0" marL="0">
+            <a:pPr marL="0" indent="0" algn="ctr">
               <a:buNone/>
             </a:pPr>
             <a:r>
@@ -19138,7 +18576,7 @@
           <a:bodyPr wrap="square" rtlCol="0" anchor="ctr"/>
           <a:lstStyle/>
           <a:p>
-            <a:pPr algn="ctr" indent="0" marL="0">
+            <a:pPr marL="0" indent="0" algn="ctr">
               <a:buNone/>
             </a:pPr>
             <a:r>
@@ -19174,7 +18612,7 @@
           <a:bodyPr wrap="square" rtlCol="0" anchor="ctr"/>
           <a:lstStyle/>
           <a:p>
-            <a:pPr algn="r" indent="0" marL="0">
+            <a:pPr marL="0" indent="0" algn="r">
               <a:buNone/>
             </a:pPr>
             <a:r>
@@ -19205,6 +18643,7 @@
         <a:solidFill>
           <a:srgbClr val="F4F8FA"/>
         </a:solidFill>
+        <a:effectLst/>
       </p:bgPr>
     </p:bg>
     <p:spTree>
@@ -19294,7 +18733,7 @@
           <a:bodyPr wrap="square" lIns="0" tIns="0" rIns="0" bIns="0" rtlCol="0" anchor="ctr"/>
           <a:lstStyle/>
           <a:p>
-            <a:pPr algn="ctr" indent="0" marL="0">
+            <a:pPr marL="0" indent="0" algn="ctr">
               <a:buNone/>
             </a:pPr>
             <a:r>
@@ -19330,7 +18769,7 @@
           <a:bodyPr wrap="square" rtlCol="0" anchor="ctr"/>
           <a:lstStyle/>
           <a:p>
-            <a:pPr indent="0" marL="0">
+            <a:pPr marL="0" indent="0">
               <a:buNone/>
             </a:pPr>
             <a:r>
@@ -19372,7 +18811,7 @@
             <a:prstDash val="solid"/>
           </a:ln>
           <a:effectLst>
-            <a:outerShdw sx="100000" sy="100000" kx="0" ky="0" algn="bl" rotWithShape="0" blurRad="101600" dist="38100" dir="8100000">
+            <a:outerShdw blurRad="101600" dist="38100" dir="8100000" algn="bl" rotWithShape="0">
               <a:srgbClr val="000000">
                 <a:alpha val="12000"/>
               </a:srgbClr>
@@ -19426,7 +18865,7 @@
           <a:bodyPr wrap="square" rtlCol="0" anchor="ctr"/>
           <a:lstStyle/>
           <a:p>
-            <a:pPr indent="0" marL="0">
+            <a:pPr marL="0" indent="0">
               <a:buNone/>
             </a:pPr>
             <a:r>
@@ -19462,7 +18901,7 @@
           <a:bodyPr wrap="square" rtlCol="0" anchor="ctr"/>
           <a:lstStyle/>
           <a:p>
-            <a:pPr indent="0" marL="0">
+            <a:pPr marL="0" indent="0">
               <a:buNone/>
             </a:pPr>
             <a:r>
@@ -19527,7 +18966,7 @@
           <a:bodyPr wrap="square" rtlCol="0" anchor="ctr"/>
           <a:lstStyle/>
           <a:p>
-            <a:pPr indent="0" marL="0">
+            <a:pPr marL="0" indent="0">
               <a:buNone/>
             </a:pPr>
             <a:r>
@@ -19563,7 +19002,7 @@
           <a:bodyPr wrap="square" rtlCol="0" anchor="ctr"/>
           <a:lstStyle/>
           <a:p>
-            <a:pPr indent="0" marL="0">
+            <a:pPr marL="0" indent="0">
               <a:buNone/>
             </a:pPr>
             <a:r>
@@ -19628,7 +19067,7 @@
           <a:bodyPr wrap="square" rtlCol="0" anchor="ctr"/>
           <a:lstStyle/>
           <a:p>
-            <a:pPr indent="0" marL="0">
+            <a:pPr marL="0" indent="0">
               <a:buNone/>
             </a:pPr>
             <a:r>
@@ -19664,7 +19103,7 @@
           <a:bodyPr wrap="square" rtlCol="0" anchor="ctr"/>
           <a:lstStyle/>
           <a:p>
-            <a:pPr indent="0" marL="0">
+            <a:pPr marL="0" indent="0">
               <a:buNone/>
             </a:pPr>
             <a:r>
@@ -19729,7 +19168,7 @@
           <a:bodyPr wrap="square" rtlCol="0" anchor="ctr"/>
           <a:lstStyle/>
           <a:p>
-            <a:pPr indent="0" marL="0">
+            <a:pPr marL="0" indent="0">
               <a:buNone/>
             </a:pPr>
             <a:r>
@@ -19765,7 +19204,7 @@
           <a:bodyPr wrap="square" rtlCol="0" anchor="ctr"/>
           <a:lstStyle/>
           <a:p>
-            <a:pPr indent="0" marL="0">
+            <a:pPr marL="0" indent="0">
               <a:buNone/>
             </a:pPr>
             <a:r>
@@ -19830,7 +19269,7 @@
           <a:bodyPr wrap="square" rtlCol="0" anchor="ctr"/>
           <a:lstStyle/>
           <a:p>
-            <a:pPr indent="0" marL="0">
+            <a:pPr marL="0" indent="0">
               <a:buNone/>
             </a:pPr>
             <a:r>
@@ -19866,7 +19305,7 @@
           <a:bodyPr wrap="square" rtlCol="0" anchor="ctr"/>
           <a:lstStyle/>
           <a:p>
-            <a:pPr indent="0" marL="0">
+            <a:pPr marL="0" indent="0">
               <a:buNone/>
             </a:pPr>
             <a:r>
@@ -19931,7 +19370,7 @@
           <a:bodyPr wrap="square" rtlCol="0" anchor="ctr"/>
           <a:lstStyle/>
           <a:p>
-            <a:pPr indent="0" marL="0">
+            <a:pPr marL="0" indent="0">
               <a:buNone/>
             </a:pPr>
             <a:r>
@@ -19967,7 +19406,7 @@
           <a:bodyPr wrap="square" rtlCol="0" anchor="ctr"/>
           <a:lstStyle/>
           <a:p>
-            <a:pPr indent="0" marL="0">
+            <a:pPr marL="0" indent="0">
               <a:buNone/>
             </a:pPr>
             <a:r>
@@ -20032,7 +19471,7 @@
           <a:bodyPr wrap="square" rtlCol="0" anchor="ctr"/>
           <a:lstStyle/>
           <a:p>
-            <a:pPr indent="0" marL="0">
+            <a:pPr marL="0" indent="0">
               <a:buNone/>
             </a:pPr>
             <a:r>
@@ -20068,7 +19507,7 @@
           <a:bodyPr wrap="square" rtlCol="0" anchor="ctr"/>
           <a:lstStyle/>
           <a:p>
-            <a:pPr indent="0" marL="0">
+            <a:pPr marL="0" indent="0">
               <a:buNone/>
             </a:pPr>
             <a:r>
@@ -20107,7 +19546,7 @@
             <a:prstDash val="solid"/>
           </a:ln>
           <a:effectLst>
-            <a:outerShdw sx="100000" sy="100000" kx="0" ky="0" algn="bl" rotWithShape="0" blurRad="101600" dist="38100" dir="8100000">
+            <a:outerShdw blurRad="101600" dist="38100" dir="8100000" algn="bl" rotWithShape="0">
               <a:srgbClr val="000000">
                 <a:alpha val="12000"/>
               </a:srgbClr>
@@ -20161,7 +19600,7 @@
           <a:bodyPr wrap="square" rtlCol="0" anchor="ctr"/>
           <a:lstStyle/>
           <a:p>
-            <a:pPr indent="0" marL="0">
+            <a:pPr marL="0" indent="0">
               <a:buNone/>
             </a:pPr>
             <a:r>
@@ -20197,7 +19636,7 @@
           <a:bodyPr wrap="square" rtlCol="0" anchor="ctr"/>
           <a:lstStyle/>
           <a:p>
-            <a:pPr indent="0" marL="0">
+            <a:pPr marL="0" indent="0">
               <a:buNone/>
             </a:pPr>
             <a:r>
@@ -20262,7 +19701,7 @@
           <a:bodyPr wrap="square" rtlCol="0" anchor="ctr"/>
           <a:lstStyle/>
           <a:p>
-            <a:pPr indent="0" marL="0">
+            <a:pPr marL="0" indent="0">
               <a:buNone/>
             </a:pPr>
             <a:r>
@@ -20298,7 +19737,7 @@
           <a:bodyPr wrap="square" rtlCol="0" anchor="ctr"/>
           <a:lstStyle/>
           <a:p>
-            <a:pPr indent="0" marL="0">
+            <a:pPr marL="0" indent="0">
               <a:buNone/>
             </a:pPr>
             <a:r>
@@ -20363,7 +19802,7 @@
           <a:bodyPr wrap="square" rtlCol="0" anchor="ctr"/>
           <a:lstStyle/>
           <a:p>
-            <a:pPr indent="0" marL="0">
+            <a:pPr marL="0" indent="0">
               <a:buNone/>
             </a:pPr>
             <a:r>
@@ -20399,7 +19838,7 @@
           <a:bodyPr wrap="square" rtlCol="0" anchor="ctr"/>
           <a:lstStyle/>
           <a:p>
-            <a:pPr indent="0" marL="0">
+            <a:pPr marL="0" indent="0">
               <a:buNone/>
             </a:pPr>
             <a:r>
@@ -20464,7 +19903,7 @@
           <a:bodyPr wrap="square" rtlCol="0" anchor="ctr"/>
           <a:lstStyle/>
           <a:p>
-            <a:pPr indent="0" marL="0">
+            <a:pPr marL="0" indent="0">
               <a:buNone/>
             </a:pPr>
             <a:r>
@@ -20500,7 +19939,7 @@
           <a:bodyPr wrap="square" rtlCol="0" anchor="ctr"/>
           <a:lstStyle/>
           <a:p>
-            <a:pPr indent="0" marL="0">
+            <a:pPr marL="0" indent="0">
               <a:buNone/>
             </a:pPr>
             <a:r>
@@ -20565,7 +20004,7 @@
           <a:bodyPr wrap="square" rtlCol="0" anchor="ctr"/>
           <a:lstStyle/>
           <a:p>
-            <a:pPr indent="0" marL="0">
+            <a:pPr marL="0" indent="0">
               <a:buNone/>
             </a:pPr>
             <a:r>
@@ -20601,7 +20040,7 @@
           <a:bodyPr wrap="square" rtlCol="0" anchor="ctr"/>
           <a:lstStyle/>
           <a:p>
-            <a:pPr indent="0" marL="0">
+            <a:pPr marL="0" indent="0">
               <a:buNone/>
             </a:pPr>
             <a:r>
@@ -20666,7 +20105,7 @@
           <a:bodyPr wrap="square" rtlCol="0" anchor="ctr"/>
           <a:lstStyle/>
           <a:p>
-            <a:pPr indent="0" marL="0">
+            <a:pPr marL="0" indent="0">
               <a:buNone/>
             </a:pPr>
             <a:r>
@@ -20702,7 +20141,7 @@
           <a:bodyPr wrap="square" rtlCol="0" anchor="ctr"/>
           <a:lstStyle/>
           <a:p>
-            <a:pPr indent="0" marL="0">
+            <a:pPr marL="0" indent="0">
               <a:buNone/>
             </a:pPr>
             <a:r>
@@ -20767,7 +20206,7 @@
           <a:bodyPr wrap="square" rtlCol="0" anchor="ctr"/>
           <a:lstStyle/>
           <a:p>
-            <a:pPr indent="0" marL="0">
+            <a:pPr marL="0" indent="0">
               <a:buNone/>
             </a:pPr>
             <a:r>
@@ -20803,7 +20242,7 @@
           <a:bodyPr wrap="square" rtlCol="0" anchor="ctr"/>
           <a:lstStyle/>
           <a:p>
-            <a:pPr indent="0" marL="0">
+            <a:pPr marL="0" indent="0">
               <a:buNone/>
             </a:pPr>
             <a:r>
@@ -20839,7 +20278,7 @@
           <a:bodyPr wrap="square" rtlCol="0" anchor="ctr"/>
           <a:lstStyle/>
           <a:p>
-            <a:pPr algn="r" indent="0" marL="0">
+            <a:pPr marL="0" indent="0" algn="r">
               <a:buNone/>
             </a:pPr>
             <a:r>
@@ -20870,6 +20309,7 @@
         <a:solidFill>
           <a:srgbClr val="F4F8FA"/>
         </a:solidFill>
+        <a:effectLst/>
       </p:bgPr>
     </p:bg>
     <p:spTree>
@@ -20959,7 +20399,7 @@
           <a:bodyPr wrap="square" lIns="0" tIns="0" rIns="0" bIns="0" rtlCol="0" anchor="ctr"/>
           <a:lstStyle/>
           <a:p>
-            <a:pPr algn="ctr" indent="0" marL="0">
+            <a:pPr marL="0" indent="0" algn="ctr">
               <a:buNone/>
             </a:pPr>
             <a:r>
@@ -20995,7 +20435,7 @@
           <a:bodyPr wrap="square" rtlCol="0" anchor="ctr"/>
           <a:lstStyle/>
           <a:p>
-            <a:pPr indent="0" marL="0">
+            <a:pPr marL="0" indent="0">
               <a:buNone/>
             </a:pPr>
             <a:r>
@@ -21037,7 +20477,7 @@
             <a:prstDash val="solid"/>
           </a:ln>
           <a:effectLst>
-            <a:outerShdw sx="100000" sy="100000" kx="0" ky="0" algn="bl" rotWithShape="0" blurRad="101600" dist="38100" dir="8100000">
+            <a:outerShdw blurRad="101600" dist="38100" dir="8100000" algn="bl" rotWithShape="0">
               <a:srgbClr val="000000">
                 <a:alpha val="12000"/>
               </a:srgbClr>
@@ -21091,7 +20531,7 @@
           <a:bodyPr wrap="square" rtlCol="0" anchor="ctr"/>
           <a:lstStyle/>
           <a:p>
-            <a:pPr indent="0" marL="0">
+            <a:pPr marL="0" indent="0">
               <a:buNone/>
             </a:pPr>
             <a:r>
@@ -21127,7 +20567,7 @@
           <a:bodyPr wrap="square" rtlCol="0" anchor="ctr"/>
           <a:lstStyle/>
           <a:p>
-            <a:pPr indent="0" marL="0">
+            <a:pPr marL="0" indent="0">
               <a:buNone/>
             </a:pPr>
             <a:r>
@@ -21163,7 +20603,7 @@
           <a:bodyPr wrap="square" rtlCol="0" anchor="ctr"/>
           <a:lstStyle/>
           <a:p>
-            <a:pPr indent="0" marL="0">
+            <a:pPr marL="0" indent="0">
               <a:buNone/>
             </a:pPr>
             <a:r>
@@ -21199,7 +20639,7 @@
           <a:bodyPr wrap="square" rtlCol="0" anchor="ctr"/>
           <a:lstStyle/>
           <a:p>
-            <a:pPr indent="0" marL="0">
+            <a:pPr marL="0" indent="0">
               <a:buNone/>
             </a:pPr>
             <a:r>
@@ -21235,7 +20675,7 @@
           <a:bodyPr wrap="square" rtlCol="0" anchor="ctr"/>
           <a:lstStyle/>
           <a:p>
-            <a:pPr indent="0" marL="0">
+            <a:pPr marL="0" indent="0">
               <a:buNone/>
             </a:pPr>
             <a:r>
@@ -21271,7 +20711,7 @@
           <a:bodyPr wrap="square" rtlCol="0" anchor="ctr"/>
           <a:lstStyle/>
           <a:p>
-            <a:pPr indent="0" marL="0">
+            <a:pPr marL="0" indent="0">
               <a:buNone/>
             </a:pPr>
             <a:r>
@@ -21310,7 +20750,7 @@
           <a:bodyPr wrap="square" rtlCol="0" anchor="ctr"/>
           <a:lstStyle/>
           <a:p>
-            <a:pPr indent="0" marL="0">
+            <a:pPr marL="0" indent="0">
               <a:buNone/>
             </a:pPr>
             <a:r>
@@ -21349,7 +20789,7 @@
           <a:bodyPr wrap="square" rtlCol="0" anchor="ctr"/>
           <a:lstStyle/>
           <a:p>
-            <a:pPr indent="0" marL="0">
+            <a:pPr marL="0" indent="0">
               <a:buNone/>
             </a:pPr>
             <a:r>
@@ -21388,7 +20828,7 @@
           <a:bodyPr wrap="square" rtlCol="0" anchor="ctr"/>
           <a:lstStyle/>
           <a:p>
-            <a:pPr indent="0" marL="0">
+            <a:pPr marL="0" indent="0">
               <a:buNone/>
             </a:pPr>
             <a:r>
@@ -21456,7 +20896,7 @@
           <a:bodyPr wrap="square" rtlCol="0" anchor="ctr"/>
           <a:lstStyle/>
           <a:p>
-            <a:pPr indent="0" marL="0">
+            <a:pPr marL="0" indent="0">
               <a:buNone/>
             </a:pPr>
             <a:r>
@@ -21495,7 +20935,7 @@
             <a:prstDash val="solid"/>
           </a:ln>
           <a:effectLst>
-            <a:outerShdw sx="100000" sy="100000" kx="0" ky="0" algn="bl" rotWithShape="0" blurRad="101600" dist="38100" dir="8100000">
+            <a:outerShdw blurRad="101600" dist="38100" dir="8100000" algn="bl" rotWithShape="0">
               <a:srgbClr val="000000">
                 <a:alpha val="12000"/>
               </a:srgbClr>
@@ -21549,7 +20989,7 @@
           <a:bodyPr wrap="square" rtlCol="0" anchor="ctr"/>
           <a:lstStyle/>
           <a:p>
-            <a:pPr indent="0" marL="0">
+            <a:pPr marL="0" indent="0">
               <a:buNone/>
             </a:pPr>
             <a:r>
@@ -21585,7 +21025,7 @@
           <a:bodyPr wrap="square" rtlCol="0" anchor="ctr"/>
           <a:lstStyle/>
           <a:p>
-            <a:pPr indent="0" marL="0">
+            <a:pPr marL="0" indent="0">
               <a:buNone/>
             </a:pPr>
             <a:r>
@@ -21650,7 +21090,7 @@
           <a:bodyPr wrap="square" rtlCol="0" anchor="ctr"/>
           <a:lstStyle/>
           <a:p>
-            <a:pPr indent="0" marL="0">
+            <a:pPr marL="0" indent="0">
               <a:buNone/>
             </a:pPr>
             <a:r>
@@ -21686,7 +21126,7 @@
           <a:bodyPr wrap="square" rtlCol="0" anchor="ctr"/>
           <a:lstStyle/>
           <a:p>
-            <a:pPr indent="0" marL="0">
+            <a:pPr marL="0" indent="0">
               <a:buNone/>
             </a:pPr>
             <a:r>
@@ -21751,7 +21191,7 @@
           <a:bodyPr wrap="square" rtlCol="0" anchor="ctr"/>
           <a:lstStyle/>
           <a:p>
-            <a:pPr indent="0" marL="0">
+            <a:pPr marL="0" indent="0">
               <a:buNone/>
             </a:pPr>
             <a:r>
@@ -21787,7 +21227,7 @@
           <a:bodyPr wrap="square" rtlCol="0" anchor="ctr"/>
           <a:lstStyle/>
           <a:p>
-            <a:pPr indent="0" marL="0">
+            <a:pPr marL="0" indent="0">
               <a:buNone/>
             </a:pPr>
             <a:r>
@@ -21852,7 +21292,7 @@
           <a:bodyPr wrap="square" rtlCol="0" anchor="ctr"/>
           <a:lstStyle/>
           <a:p>
-            <a:pPr indent="0" marL="0">
+            <a:pPr marL="0" indent="0">
               <a:buNone/>
             </a:pPr>
             <a:r>
@@ -21888,7 +21328,7 @@
           <a:bodyPr wrap="square" rtlCol="0" anchor="ctr"/>
           <a:lstStyle/>
           <a:p>
-            <a:pPr indent="0" marL="0">
+            <a:pPr marL="0" indent="0">
               <a:buNone/>
             </a:pPr>
             <a:r>
@@ -21953,7 +21393,7 @@
           <a:bodyPr wrap="square" rtlCol="0" anchor="ctr"/>
           <a:lstStyle/>
           <a:p>
-            <a:pPr indent="0" marL="0">
+            <a:pPr marL="0" indent="0">
               <a:buNone/>
             </a:pPr>
             <a:r>
@@ -21989,7 +21429,7 @@
           <a:bodyPr wrap="square" rtlCol="0" anchor="ctr"/>
           <a:lstStyle/>
           <a:p>
-            <a:pPr indent="0" marL="0">
+            <a:pPr marL="0" indent="0">
               <a:buNone/>
             </a:pPr>
             <a:r>
@@ -22054,7 +21494,7 @@
           <a:bodyPr wrap="square" rtlCol="0" anchor="ctr"/>
           <a:lstStyle/>
           <a:p>
-            <a:pPr indent="0" marL="0">
+            <a:pPr marL="0" indent="0">
               <a:buNone/>
             </a:pPr>
             <a:r>
@@ -22090,7 +21530,7 @@
           <a:bodyPr wrap="square" rtlCol="0" anchor="ctr"/>
           <a:lstStyle/>
           <a:p>
-            <a:pPr indent="0" marL="0">
+            <a:pPr marL="0" indent="0">
               <a:buNone/>
             </a:pPr>
             <a:r>
@@ -22155,7 +21595,7 @@
           <a:bodyPr wrap="square" rtlCol="0" anchor="ctr"/>
           <a:lstStyle/>
           <a:p>
-            <a:pPr indent="0" marL="0">
+            <a:pPr marL="0" indent="0">
               <a:buNone/>
             </a:pPr>
             <a:r>
@@ -22191,7 +21631,7 @@
           <a:bodyPr wrap="square" rtlCol="0" anchor="ctr"/>
           <a:lstStyle/>
           <a:p>
-            <a:pPr indent="0" marL="0">
+            <a:pPr marL="0" indent="0">
               <a:buNone/>
             </a:pPr>
             <a:r>
@@ -22256,7 +21696,7 @@
           <a:bodyPr wrap="square" rtlCol="0" anchor="ctr"/>
           <a:lstStyle/>
           <a:p>
-            <a:pPr indent="0" marL="0">
+            <a:pPr marL="0" indent="0">
               <a:buNone/>
             </a:pPr>
             <a:r>
@@ -22292,7 +21732,7 @@
           <a:bodyPr wrap="square" rtlCol="0" anchor="ctr"/>
           <a:lstStyle/>
           <a:p>
-            <a:pPr indent="0" marL="0">
+            <a:pPr marL="0" indent="0">
               <a:buNone/>
             </a:pPr>
             <a:r>
@@ -22328,7 +21768,7 @@
           <a:bodyPr wrap="square" rtlCol="0" anchor="ctr"/>
           <a:lstStyle/>
           <a:p>
-            <a:pPr indent="0" marL="0">
+            <a:pPr marL="0" indent="0">
               <a:buNone/>
             </a:pPr>
             <a:r>
@@ -22364,7 +21804,7 @@
           <a:bodyPr wrap="square" rtlCol="0" anchor="ctr"/>
           <a:lstStyle/>
           <a:p>
-            <a:pPr algn="r" indent="0" marL="0">
+            <a:pPr marL="0" indent="0" algn="r">
               <a:buNone/>
             </a:pPr>
             <a:r>
@@ -22395,6 +21835,7 @@
         <a:solidFill>
           <a:srgbClr val="F4F8FA"/>
         </a:solidFill>
+        <a:effectLst/>
       </p:bgPr>
     </p:bg>
     <p:spTree>
@@ -22484,7 +21925,7 @@
           <a:bodyPr wrap="square" lIns="0" tIns="0" rIns="0" bIns="0" rtlCol="0" anchor="ctr"/>
           <a:lstStyle/>
           <a:p>
-            <a:pPr algn="ctr" indent="0" marL="0">
+            <a:pPr marL="0" indent="0" algn="ctr">
               <a:buNone/>
             </a:pPr>
             <a:r>
@@ -22520,7 +21961,7 @@
           <a:bodyPr wrap="square" rtlCol="0" anchor="ctr"/>
           <a:lstStyle/>
           <a:p>
-            <a:pPr indent="0" marL="0">
+            <a:pPr marL="0" indent="0">
               <a:buNone/>
             </a:pPr>
             <a:r>
@@ -22562,7 +22003,7 @@
             <a:prstDash val="solid"/>
           </a:ln>
           <a:effectLst>
-            <a:outerShdw sx="100000" sy="100000" kx="0" ky="0" algn="bl" rotWithShape="0" blurRad="101600" dist="38100" dir="8100000">
+            <a:outerShdw blurRad="101600" dist="38100" dir="8100000" algn="bl" rotWithShape="0">
               <a:srgbClr val="000000">
                 <a:alpha val="12000"/>
               </a:srgbClr>
@@ -22616,7 +22057,7 @@
           <a:bodyPr wrap="square" rtlCol="0" anchor="ctr"/>
           <a:lstStyle/>
           <a:p>
-            <a:pPr indent="0" marL="0">
+            <a:pPr marL="0" indent="0">
               <a:buNone/>
             </a:pPr>
             <a:r>
@@ -22652,7 +22093,7 @@
           <a:bodyPr wrap="square" rtlCol="0" anchor="ctr"/>
           <a:lstStyle/>
           <a:p>
-            <a:pPr indent="0" marL="0">
+            <a:pPr marL="0" indent="0">
               <a:buNone/>
             </a:pPr>
             <a:r>
@@ -22688,7 +22129,7 @@
           <a:bodyPr wrap="square" rtlCol="0" anchor="ctr"/>
           <a:lstStyle/>
           <a:p>
-            <a:pPr indent="0" marL="0">
+            <a:pPr marL="0" indent="0">
               <a:buNone/>
             </a:pPr>
             <a:r>
@@ -22724,7 +22165,7 @@
           <a:bodyPr wrap="square" rtlCol="0" anchor="ctr"/>
           <a:lstStyle/>
           <a:p>
-            <a:pPr indent="0" marL="0">
+            <a:pPr marL="0" indent="0">
               <a:buNone/>
             </a:pPr>
             <a:r>
@@ -22760,7 +22201,7 @@
           <a:bodyPr wrap="square" rtlCol="0" anchor="ctr"/>
           <a:lstStyle/>
           <a:p>
-            <a:pPr indent="0" marL="0">
+            <a:pPr marL="0" indent="0">
               <a:buNone/>
             </a:pPr>
             <a:r>
@@ -22796,7 +22237,7 @@
           <a:bodyPr wrap="square" rtlCol="0" anchor="ctr"/>
           <a:lstStyle/>
           <a:p>
-            <a:pPr indent="0" marL="0">
+            <a:pPr marL="0" indent="0">
               <a:buNone/>
             </a:pPr>
             <a:r>
@@ -22832,7 +22273,7 @@
           <a:bodyPr wrap="square" rtlCol="0" anchor="ctr"/>
           <a:lstStyle/>
           <a:p>
-            <a:pPr indent="0" marL="0">
+            <a:pPr marL="0" indent="0">
               <a:buNone/>
             </a:pPr>
             <a:r>
@@ -22868,7 +22309,7 @@
           <a:bodyPr wrap="square" rtlCol="0" anchor="ctr"/>
           <a:lstStyle/>
           <a:p>
-            <a:pPr indent="0" marL="0">
+            <a:pPr marL="0" indent="0">
               <a:buNone/>
             </a:pPr>
             <a:r>
@@ -22904,7 +22345,7 @@
           <a:bodyPr wrap="square" rtlCol="0" anchor="ctr"/>
           <a:lstStyle/>
           <a:p>
-            <a:pPr indent="0" marL="0">
+            <a:pPr marL="0" indent="0">
               <a:buNone/>
             </a:pPr>
             <a:r>
@@ -22940,7 +22381,7 @@
           <a:bodyPr wrap="square" rtlCol="0" anchor="ctr"/>
           <a:lstStyle/>
           <a:p>
-            <a:pPr indent="0" marL="0">
+            <a:pPr marL="0" indent="0">
               <a:buNone/>
             </a:pPr>
             <a:r>
@@ -23005,7 +22446,7 @@
           <a:bodyPr wrap="square" rtlCol="0" anchor="ctr"/>
           <a:lstStyle/>
           <a:p>
-            <a:pPr indent="0" marL="0">
+            <a:pPr marL="0" indent="0">
               <a:buNone/>
             </a:pPr>
             <a:r>
@@ -23044,7 +22485,7 @@
             <a:prstDash val="solid"/>
           </a:ln>
           <a:effectLst>
-            <a:outerShdw sx="100000" sy="100000" kx="0" ky="0" algn="bl" rotWithShape="0" blurRad="101600" dist="38100" dir="8100000">
+            <a:outerShdw blurRad="101600" dist="38100" dir="8100000" algn="bl" rotWithShape="0">
               <a:srgbClr val="000000">
                 <a:alpha val="12000"/>
               </a:srgbClr>
@@ -23098,7 +22539,7 @@
           <a:bodyPr wrap="square" rtlCol="0" anchor="ctr"/>
           <a:lstStyle/>
           <a:p>
-            <a:pPr indent="0" marL="0">
+            <a:pPr marL="0" indent="0">
               <a:buNone/>
             </a:pPr>
             <a:r>
@@ -23134,7 +22575,7 @@
           <a:bodyPr wrap="square" rtlCol="0" anchor="ctr"/>
           <a:lstStyle/>
           <a:p>
-            <a:pPr indent="0" marL="0">
+            <a:pPr marL="0" indent="0">
               <a:buNone/>
             </a:pPr>
             <a:r>
@@ -23170,7 +22611,7 @@
           <a:bodyPr wrap="square" rtlCol="0" anchor="ctr"/>
           <a:lstStyle/>
           <a:p>
-            <a:pPr indent="0" marL="0">
+            <a:pPr marL="0" indent="0">
               <a:buNone/>
             </a:pPr>
             <a:r>
@@ -23235,7 +22676,7 @@
           <a:bodyPr wrap="square" rtlCol="0" anchor="ctr"/>
           <a:lstStyle/>
           <a:p>
-            <a:pPr indent="0" marL="0">
+            <a:pPr marL="0" indent="0">
               <a:buNone/>
             </a:pPr>
             <a:r>
@@ -23300,7 +22741,7 @@
           <a:bodyPr wrap="square" rtlCol="0" anchor="ctr"/>
           <a:lstStyle/>
           <a:p>
-            <a:pPr indent="0" marL="0">
+            <a:pPr marL="0" indent="0">
               <a:buNone/>
             </a:pPr>
             <a:r>
@@ -23365,7 +22806,7 @@
           <a:bodyPr wrap="square" rtlCol="0" anchor="ctr"/>
           <a:lstStyle/>
           <a:p>
-            <a:pPr indent="0" marL="0">
+            <a:pPr marL="0" indent="0">
               <a:buNone/>
             </a:pPr>
             <a:r>
@@ -23430,7 +22871,7 @@
           <a:bodyPr wrap="square" rtlCol="0" anchor="ctr"/>
           <a:lstStyle/>
           <a:p>
-            <a:pPr indent="0" marL="0">
+            <a:pPr marL="0" indent="0">
               <a:buNone/>
             </a:pPr>
             <a:r>
@@ -23495,7 +22936,7 @@
           <a:bodyPr wrap="square" rtlCol="0" anchor="ctr"/>
           <a:lstStyle/>
           <a:p>
-            <a:pPr indent="0" marL="0">
+            <a:pPr marL="0" indent="0">
               <a:buNone/>
             </a:pPr>
             <a:r>
@@ -23560,7 +23001,7 @@
           <a:bodyPr wrap="square" rtlCol="0" anchor="ctr"/>
           <a:lstStyle/>
           <a:p>
-            <a:pPr indent="0" marL="0">
+            <a:pPr marL="0" indent="0">
               <a:buNone/>
             </a:pPr>
             <a:r>
@@ -23596,7 +23037,7 @@
           <a:bodyPr wrap="square" rtlCol="0" anchor="ctr"/>
           <a:lstStyle/>
           <a:p>
-            <a:pPr algn="r" indent="0" marL="0">
+            <a:pPr marL="0" indent="0" algn="r">
               <a:buNone/>
             </a:pPr>
             <a:r>
@@ -23912,4 +23353,299 @@
     </a:ext>
   </a:extLst>
 </a:theme>
+</file>
+
+<file path=ppt/theme/theme2.xml><?xml version="1.0" encoding="utf-8"?>
+<a:theme xmlns:a="http://schemas.openxmlformats.org/drawingml/2006/main" name="Office Theme">
+  <a:themeElements>
+    <a:clrScheme name="Office">
+      <a:dk1>
+        <a:sysClr val="windowText" lastClr="000000"/>
+      </a:dk1>
+      <a:lt1>
+        <a:sysClr val="window" lastClr="FFFFFF"/>
+      </a:lt1>
+      <a:dk2>
+        <a:srgbClr val="44546A"/>
+      </a:dk2>
+      <a:lt2>
+        <a:srgbClr val="E7E6E6"/>
+      </a:lt2>
+      <a:accent1>
+        <a:srgbClr val="4472C4"/>
+      </a:accent1>
+      <a:accent2>
+        <a:srgbClr val="ED7D31"/>
+      </a:accent2>
+      <a:accent3>
+        <a:srgbClr val="A5A5A5"/>
+      </a:accent3>
+      <a:accent4>
+        <a:srgbClr val="FFC000"/>
+      </a:accent4>
+      <a:accent5>
+        <a:srgbClr val="5B9BD5"/>
+      </a:accent5>
+      <a:accent6>
+        <a:srgbClr val="70AD47"/>
+      </a:accent6>
+      <a:hlink>
+        <a:srgbClr val="0563C1"/>
+      </a:hlink>
+      <a:folHlink>
+        <a:srgbClr val="954F72"/>
+      </a:folHlink>
+    </a:clrScheme>
+    <a:fontScheme name="Office">
+      <a:majorFont>
+        <a:latin typeface="Calibri Light" panose="020F0302020204030204"/>
+        <a:ea typeface=""/>
+        <a:cs typeface=""/>
+        <a:font script="Jpan" typeface="游ゴシック Light"/>
+        <a:font script="Hang" typeface="맑은 고딕"/>
+        <a:font script="Hans" typeface="等线 Light"/>
+        <a:font script="Hant" typeface="新細明體"/>
+        <a:font script="Arab" typeface="Times New Roman"/>
+        <a:font script="Hebr" typeface="Times New Roman"/>
+        <a:font script="Thai" typeface="Angsana New"/>
+        <a:font script="Ethi" typeface="Nyala"/>
+        <a:font script="Beng" typeface="Vrinda"/>
+        <a:font script="Gujr" typeface="Shruti"/>
+        <a:font script="Khmr" typeface="MoolBoran"/>
+        <a:font script="Knda" typeface="Tunga"/>
+        <a:font script="Guru" typeface="Raavi"/>
+        <a:font script="Cans" typeface="Euphemia"/>
+        <a:font script="Cher" typeface="Plantagenet Cherokee"/>
+        <a:font script="Yiii" typeface="Microsoft Yi Baiti"/>
+        <a:font script="Tibt" typeface="Microsoft Himalaya"/>
+        <a:font script="Thaa" typeface="MV Boli"/>
+        <a:font script="Deva" typeface="Mangal"/>
+        <a:font script="Telu" typeface="Gautami"/>
+        <a:font script="Taml" typeface="Latha"/>
+        <a:font script="Syrc" typeface="Estrangelo Edessa"/>
+        <a:font script="Orya" typeface="Kalinga"/>
+        <a:font script="Mlym" typeface="Kartika"/>
+        <a:font script="Laoo" typeface="DokChampa"/>
+        <a:font script="Sinh" typeface="Iskoola Pota"/>
+        <a:font script="Mong" typeface="Mongolian Baiti"/>
+        <a:font script="Viet" typeface="Times New Roman"/>
+        <a:font script="Uigh" typeface="Microsoft Uighur"/>
+        <a:font script="Geor" typeface="Sylfaen"/>
+        <a:font script="Armn" typeface="Arial"/>
+        <a:font script="Bugi" typeface="Leelawadee UI"/>
+        <a:font script="Bopo" typeface="Microsoft JhengHei"/>
+        <a:font script="Java" typeface="Javanese Text"/>
+        <a:font script="Lisu" typeface="Segoe UI"/>
+        <a:font script="Mymr" typeface="Myanmar Text"/>
+        <a:font script="Nkoo" typeface="Ebrima"/>
+        <a:font script="Olck" typeface="Nirmala UI"/>
+        <a:font script="Osma" typeface="Ebrima"/>
+        <a:font script="Phag" typeface="Phagspa"/>
+        <a:font script="Syrn" typeface="Estrangelo Edessa"/>
+        <a:font script="Syrj" typeface="Estrangelo Edessa"/>
+        <a:font script="Syre" typeface="Estrangelo Edessa"/>
+        <a:font script="Sora" typeface="Nirmala UI"/>
+        <a:font script="Tale" typeface="Microsoft Tai Le"/>
+        <a:font script="Talu" typeface="Microsoft New Tai Lue"/>
+        <a:font script="Tfng" typeface="Ebrima"/>
+      </a:majorFont>
+      <a:minorFont>
+        <a:latin typeface="Calibri" panose="020F0502020204030204"/>
+        <a:ea typeface=""/>
+        <a:cs typeface=""/>
+        <a:font script="Jpan" typeface="游ゴシック"/>
+        <a:font script="Hang" typeface="맑은 고딕"/>
+        <a:font script="Hans" typeface="等线"/>
+        <a:font script="Hant" typeface="新細明體"/>
+        <a:font script="Arab" typeface="Arial"/>
+        <a:font script="Hebr" typeface="Arial"/>
+        <a:font script="Thai" typeface="Cordia New"/>
+        <a:font script="Ethi" typeface="Nyala"/>
+        <a:font script="Beng" typeface="Vrinda"/>
+        <a:font script="Gujr" typeface="Shruti"/>
+        <a:font script="Khmr" typeface="DaunPenh"/>
+        <a:font script="Knda" typeface="Tunga"/>
+        <a:font script="Guru" typeface="Raavi"/>
+        <a:font script="Cans" typeface="Euphemia"/>
+        <a:font script="Cher" typeface="Plantagenet Cherokee"/>
+        <a:font script="Yiii" typeface="Microsoft Yi Baiti"/>
+        <a:font script="Tibt" typeface="Microsoft Himalaya"/>
+        <a:font script="Thaa" typeface="MV Boli"/>
+        <a:font script="Deva" typeface="Mangal"/>
+        <a:font script="Telu" typeface="Gautami"/>
+        <a:font script="Taml" typeface="Latha"/>
+        <a:font script="Syrc" typeface="Estrangelo Edessa"/>
+        <a:font script="Orya" typeface="Kalinga"/>
+        <a:font script="Mlym" typeface="Kartika"/>
+        <a:font script="Laoo" typeface="DokChampa"/>
+        <a:font script="Sinh" typeface="Iskoola Pota"/>
+        <a:font script="Mong" typeface="Mongolian Baiti"/>
+        <a:font script="Viet" typeface="Arial"/>
+        <a:font script="Uigh" typeface="Microsoft Uighur"/>
+        <a:font script="Geor" typeface="Sylfaen"/>
+        <a:font script="Armn" typeface="Arial"/>
+        <a:font script="Bugi" typeface="Leelawadee UI"/>
+        <a:font script="Bopo" typeface="Microsoft JhengHei"/>
+        <a:font script="Java" typeface="Javanese Text"/>
+        <a:font script="Lisu" typeface="Segoe UI"/>
+        <a:font script="Mymr" typeface="Myanmar Text"/>
+        <a:font script="Nkoo" typeface="Ebrima"/>
+        <a:font script="Olck" typeface="Nirmala UI"/>
+        <a:font script="Osma" typeface="Ebrima"/>
+        <a:font script="Phag" typeface="Phagspa"/>
+        <a:font script="Syrn" typeface="Estrangelo Edessa"/>
+        <a:font script="Syrj" typeface="Estrangelo Edessa"/>
+        <a:font script="Syre" typeface="Estrangelo Edessa"/>
+        <a:font script="Sora" typeface="Nirmala UI"/>
+        <a:font script="Tale" typeface="Microsoft Tai Le"/>
+        <a:font script="Talu" typeface="Microsoft New Tai Lue"/>
+        <a:font script="Tfng" typeface="Ebrima"/>
+      </a:minorFont>
+    </a:fontScheme>
+    <a:fmtScheme name="Office">
+      <a:fillStyleLst>
+        <a:solidFill>
+          <a:schemeClr val="phClr"/>
+        </a:solidFill>
+        <a:gradFill rotWithShape="1">
+          <a:gsLst>
+            <a:gs pos="0">
+              <a:schemeClr val="phClr">
+                <a:lumMod val="110000"/>
+                <a:satMod val="105000"/>
+                <a:tint val="67000"/>
+              </a:schemeClr>
+            </a:gs>
+            <a:gs pos="50000">
+              <a:schemeClr val="phClr">
+                <a:lumMod val="105000"/>
+                <a:satMod val="103000"/>
+                <a:tint val="73000"/>
+              </a:schemeClr>
+            </a:gs>
+            <a:gs pos="100000">
+              <a:schemeClr val="phClr">
+                <a:lumMod val="105000"/>
+                <a:satMod val="109000"/>
+                <a:tint val="81000"/>
+              </a:schemeClr>
+            </a:gs>
+          </a:gsLst>
+          <a:lin ang="5400000" scaled="0"/>
+        </a:gradFill>
+        <a:gradFill rotWithShape="1">
+          <a:gsLst>
+            <a:gs pos="0">
+              <a:schemeClr val="phClr">
+                <a:satMod val="103000"/>
+                <a:lumMod val="102000"/>
+                <a:tint val="94000"/>
+              </a:schemeClr>
+            </a:gs>
+            <a:gs pos="50000">
+              <a:schemeClr val="phClr">
+                <a:satMod val="110000"/>
+                <a:lumMod val="100000"/>
+                <a:shade val="100000"/>
+              </a:schemeClr>
+            </a:gs>
+            <a:gs pos="100000">
+              <a:schemeClr val="phClr">
+                <a:lumMod val="99000"/>
+                <a:satMod val="120000"/>
+                <a:shade val="78000"/>
+              </a:schemeClr>
+            </a:gs>
+          </a:gsLst>
+          <a:lin ang="5400000" scaled="0"/>
+        </a:gradFill>
+      </a:fillStyleLst>
+      <a:lnStyleLst>
+        <a:ln w="6350" cap="flat" cmpd="sng" algn="ctr">
+          <a:solidFill>
+            <a:schemeClr val="phClr"/>
+          </a:solidFill>
+          <a:prstDash val="solid"/>
+          <a:miter lim="800000"/>
+        </a:ln>
+        <a:ln w="12700" cap="flat" cmpd="sng" algn="ctr">
+          <a:solidFill>
+            <a:schemeClr val="phClr"/>
+          </a:solidFill>
+          <a:prstDash val="solid"/>
+          <a:miter lim="800000"/>
+        </a:ln>
+        <a:ln w="19050" cap="flat" cmpd="sng" algn="ctr">
+          <a:solidFill>
+            <a:schemeClr val="phClr"/>
+          </a:solidFill>
+          <a:prstDash val="solid"/>
+          <a:miter lim="800000"/>
+        </a:ln>
+      </a:lnStyleLst>
+      <a:effectStyleLst>
+        <a:effectStyle>
+          <a:effectLst/>
+        </a:effectStyle>
+        <a:effectStyle>
+          <a:effectLst/>
+        </a:effectStyle>
+        <a:effectStyle>
+          <a:effectLst>
+            <a:outerShdw blurRad="57150" dist="19050" dir="5400000" algn="ctr" rotWithShape="0">
+              <a:srgbClr val="000000">
+                <a:alpha val="63000"/>
+              </a:srgbClr>
+            </a:outerShdw>
+          </a:effectLst>
+        </a:effectStyle>
+      </a:effectStyleLst>
+      <a:bgFillStyleLst>
+        <a:solidFill>
+          <a:schemeClr val="phClr"/>
+        </a:solidFill>
+        <a:solidFill>
+          <a:schemeClr val="phClr">
+            <a:tint val="95000"/>
+            <a:satMod val="170000"/>
+          </a:schemeClr>
+        </a:solidFill>
+        <a:gradFill rotWithShape="1">
+          <a:gsLst>
+            <a:gs pos="0">
+              <a:schemeClr val="phClr">
+                <a:tint val="93000"/>
+                <a:satMod val="150000"/>
+                <a:shade val="98000"/>
+                <a:lumMod val="102000"/>
+              </a:schemeClr>
+            </a:gs>
+            <a:gs pos="50000">
+              <a:schemeClr val="phClr">
+                <a:tint val="98000"/>
+                <a:satMod val="130000"/>
+                <a:shade val="90000"/>
+                <a:lumMod val="103000"/>
+              </a:schemeClr>
+            </a:gs>
+            <a:gs pos="100000">
+              <a:schemeClr val="phClr">
+                <a:shade val="63000"/>
+                <a:satMod val="120000"/>
+              </a:schemeClr>
+            </a:gs>
+          </a:gsLst>
+          <a:lin ang="5400000" scaled="0"/>
+        </a:gradFill>
+      </a:bgFillStyleLst>
+    </a:fmtScheme>
+  </a:themeElements>
+  <a:objectDefaults/>
+  <a:extraClrSchemeLst/>
+  <a:extLst>
+    <a:ext uri="{05A4C25C-085E-4340-85A3-A5531E510DB2}">
+      <thm15:themeFamily xmlns:thm15="http://schemas.microsoft.com/office/thememl/2012/main" name="Office Theme" id="{62F939B6-93AF-4DB8-9C6B-D6C7DFDC589F}" vid="{4A3C46E8-61CC-4603-A589-7422A47A8E4A}"/>
+    </a:ext>
+  </a:extLst>
+</a:theme>
 </file>